--- a/media/module2/slides.pptx
+++ b/media/module2/slides.pptx
@@ -86,6 +86,18 @@
     <p:sldId id="334" r:id="rId86"/>
     <p:sldId id="335" r:id="rId87"/>
     <p:sldId id="336" r:id="rId88"/>
+    <p:sldId id="337" r:id="rId89"/>
+    <p:sldId id="338" r:id="rId90"/>
+    <p:sldId id="339" r:id="rId91"/>
+    <p:sldId id="340" r:id="rId92"/>
+    <p:sldId id="341" r:id="rId93"/>
+    <p:sldId id="342" r:id="rId94"/>
+    <p:sldId id="343" r:id="rId95"/>
+    <p:sldId id="344" r:id="rId96"/>
+    <p:sldId id="345" r:id="rId97"/>
+    <p:sldId id="346" r:id="rId98"/>
+    <p:sldId id="347" r:id="rId99"/>
+    <p:sldId id="348" r:id="rId100"/>
   </p:sldIdLst>
   <p:sldSz cx="12191695" cy="6858000" type="screen4x3"/>
   <p:notesSz cx="6858000" cy="9144000"/>
@@ -5227,6 +5239,706 @@
 </p:notes>
 </file>
 
+<file path=ppt/notesSlides/notesSlide70.xml><?xml version="1.0" encoding="utf-8"?>
+<p:notes xmlns:a="http://schemas.openxmlformats.org/drawingml/2006/main" xmlns:p="http://schemas.openxmlformats.org/presentationml/2006/main" xmlns:r="http://schemas.openxmlformats.org/officeDocument/2006/relationships">
+  <p:cSld>
+    <p:spTree>
+      <p:nvGrpSpPr>
+        <p:cNvPr id="1" name=""/>
+        <p:cNvGrpSpPr/>
+        <p:nvPr/>
+      </p:nvGrpSpPr>
+      <p:grpSpPr>
+        <a:xfrm>
+          <a:off x="0" y="0"/>
+          <a:ext cx="0" cy="0"/>
+          <a:chOff x="0" y="0"/>
+          <a:chExt cx="0" cy="0"/>
+        </a:xfrm>
+      </p:grpSpPr>
+      <p:sp>
+        <p:nvSpPr>
+          <p:cNvPr id="2" name="Slide Image Placeholder 1"/>
+          <p:cNvSpPr>
+            <a:spLocks noGrp="1"/>
+          </p:cNvSpPr>
+          <p:nvPr>
+            <p:ph type="sldImg" idx="2"/>
+          </p:nvPr>
+        </p:nvSpPr>
+        <p:spPr/>
+      </p:sp>
+      <p:sp>
+        <p:nvSpPr>
+          <p:cNvPr id="3" name="Notes Placeholder 2"/>
+          <p:cNvSpPr>
+            <a:spLocks noGrp="1"/>
+          </p:cNvSpPr>
+          <p:nvPr>
+            <p:ph type="body" idx="3" sz="quarter"/>
+          </p:nvPr>
+        </p:nvSpPr>
+        <p:spPr/>
+        <p:txBody>
+          <a:bodyPr/>
+          <a:lstStyle/>
+          <a:p>
+            <a:r>
+              <a:t>module2/examples/clock_generation/README.md</a:t>
+            </a:r>
+          </a:p>
+        </p:txBody>
+      </p:sp>
+      <p:sp>
+        <p:nvSpPr>
+          <p:cNvPr id="4" name="Slide Number Placeholder 3"/>
+          <p:cNvSpPr>
+            <a:spLocks noGrp="1"/>
+          </p:cNvSpPr>
+          <p:nvPr>
+            <p:ph type="sldNum" idx="5" sz="quarter"/>
+          </p:nvPr>
+        </p:nvSpPr>
+        <p:spPr/>
+      </p:sp>
+    </p:spTree>
+  </p:cSld>
+  <p:clrMapOvr>
+    <a:masterClrMapping/>
+  </p:clrMapOvr>
+</p:notes>
+</file>
+
+<file path=ppt/notesSlides/notesSlide71.xml><?xml version="1.0" encoding="utf-8"?>
+<p:notes xmlns:a="http://schemas.openxmlformats.org/drawingml/2006/main" xmlns:p="http://schemas.openxmlformats.org/presentationml/2006/main" xmlns:r="http://schemas.openxmlformats.org/officeDocument/2006/relationships">
+  <p:cSld>
+    <p:spTree>
+      <p:nvGrpSpPr>
+        <p:cNvPr id="1" name=""/>
+        <p:cNvGrpSpPr/>
+        <p:nvPr/>
+      </p:nvGrpSpPr>
+      <p:grpSpPr>
+        <a:xfrm>
+          <a:off x="0" y="0"/>
+          <a:ext cx="0" cy="0"/>
+          <a:chOff x="0" y="0"/>
+          <a:chExt cx="0" cy="0"/>
+        </a:xfrm>
+      </p:grpSpPr>
+      <p:sp>
+        <p:nvSpPr>
+          <p:cNvPr id="2" name="Slide Image Placeholder 1"/>
+          <p:cNvSpPr>
+            <a:spLocks noGrp="1"/>
+          </p:cNvSpPr>
+          <p:nvPr>
+            <p:ph type="sldImg" idx="2"/>
+          </p:nvPr>
+        </p:nvSpPr>
+        <p:spPr/>
+      </p:sp>
+      <p:sp>
+        <p:nvSpPr>
+          <p:cNvPr id="3" name="Notes Placeholder 2"/>
+          <p:cNvSpPr>
+            <a:spLocks noGrp="1"/>
+          </p:cNvSpPr>
+          <p:nvPr>
+            <p:ph type="body" idx="3" sz="quarter"/>
+          </p:nvPr>
+        </p:nvSpPr>
+        <p:spPr/>
+        <p:txBody>
+          <a:bodyPr/>
+          <a:lstStyle/>
+          <a:p>
+            <a:r>
+              <a:t>Hands-on: module2/examples/clock_generation/</a:t>
+            </a:r>
+          </a:p>
+        </p:txBody>
+      </p:sp>
+      <p:sp>
+        <p:nvSpPr>
+          <p:cNvPr id="4" name="Slide Number Placeholder 3"/>
+          <p:cNvSpPr>
+            <a:spLocks noGrp="1"/>
+          </p:cNvSpPr>
+          <p:nvPr>
+            <p:ph type="sldNum" idx="5" sz="quarter"/>
+          </p:nvPr>
+        </p:nvSpPr>
+        <p:spPr/>
+      </p:sp>
+    </p:spTree>
+  </p:cSld>
+  <p:clrMapOvr>
+    <a:masterClrMapping/>
+  </p:clrMapOvr>
+</p:notes>
+</file>
+
+<file path=ppt/notesSlides/notesSlide72.xml><?xml version="1.0" encoding="utf-8"?>
+<p:notes xmlns:a="http://schemas.openxmlformats.org/drawingml/2006/main" xmlns:p="http://schemas.openxmlformats.org/presentationml/2006/main" xmlns:r="http://schemas.openxmlformats.org/officeDocument/2006/relationships">
+  <p:cSld>
+    <p:spTree>
+      <p:nvGrpSpPr>
+        <p:cNvPr id="1" name=""/>
+        <p:cNvGrpSpPr/>
+        <p:nvPr/>
+      </p:nvGrpSpPr>
+      <p:grpSpPr>
+        <a:xfrm>
+          <a:off x="0" y="0"/>
+          <a:ext cx="0" cy="0"/>
+          <a:chOff x="0" y="0"/>
+          <a:chExt cx="0" cy="0"/>
+        </a:xfrm>
+      </p:grpSpPr>
+      <p:sp>
+        <p:nvSpPr>
+          <p:cNvPr id="2" name="Slide Image Placeholder 1"/>
+          <p:cNvSpPr>
+            <a:spLocks noGrp="1"/>
+          </p:cNvSpPr>
+          <p:nvPr>
+            <p:ph type="sldImg" idx="2"/>
+          </p:nvPr>
+        </p:nvSpPr>
+        <p:spPr/>
+      </p:sp>
+      <p:sp>
+        <p:nvSpPr>
+          <p:cNvPr id="3" name="Notes Placeholder 2"/>
+          <p:cNvSpPr>
+            <a:spLocks noGrp="1"/>
+          </p:cNvSpPr>
+          <p:nvPr>
+            <p:ph type="body" idx="3" sz="quarter"/>
+          </p:nvPr>
+        </p:nvSpPr>
+        <p:spPr/>
+        <p:txBody>
+          <a:bodyPr/>
+          <a:lstStyle/>
+          <a:p>
+            <a:r>
+              <a:t>module2/examples/reset_patterns/README.md</a:t>
+            </a:r>
+          </a:p>
+        </p:txBody>
+      </p:sp>
+      <p:sp>
+        <p:nvSpPr>
+          <p:cNvPr id="4" name="Slide Number Placeholder 3"/>
+          <p:cNvSpPr>
+            <a:spLocks noGrp="1"/>
+          </p:cNvSpPr>
+          <p:nvPr>
+            <p:ph type="sldNum" idx="5" sz="quarter"/>
+          </p:nvPr>
+        </p:nvSpPr>
+        <p:spPr/>
+      </p:sp>
+    </p:spTree>
+  </p:cSld>
+  <p:clrMapOvr>
+    <a:masterClrMapping/>
+  </p:clrMapOvr>
+</p:notes>
+</file>
+
+<file path=ppt/notesSlides/notesSlide73.xml><?xml version="1.0" encoding="utf-8"?>
+<p:notes xmlns:a="http://schemas.openxmlformats.org/drawingml/2006/main" xmlns:p="http://schemas.openxmlformats.org/presentationml/2006/main" xmlns:r="http://schemas.openxmlformats.org/officeDocument/2006/relationships">
+  <p:cSld>
+    <p:spTree>
+      <p:nvGrpSpPr>
+        <p:cNvPr id="1" name=""/>
+        <p:cNvGrpSpPr/>
+        <p:nvPr/>
+      </p:nvGrpSpPr>
+      <p:grpSpPr>
+        <a:xfrm>
+          <a:off x="0" y="0"/>
+          <a:ext cx="0" cy="0"/>
+          <a:chOff x="0" y="0"/>
+          <a:chExt cx="0" cy="0"/>
+        </a:xfrm>
+      </p:grpSpPr>
+      <p:sp>
+        <p:nvSpPr>
+          <p:cNvPr id="2" name="Slide Image Placeholder 1"/>
+          <p:cNvSpPr>
+            <a:spLocks noGrp="1"/>
+          </p:cNvSpPr>
+          <p:nvPr>
+            <p:ph type="sldImg" idx="2"/>
+          </p:nvPr>
+        </p:nvSpPr>
+        <p:spPr/>
+      </p:sp>
+      <p:sp>
+        <p:nvSpPr>
+          <p:cNvPr id="3" name="Notes Placeholder 2"/>
+          <p:cNvSpPr>
+            <a:spLocks noGrp="1"/>
+          </p:cNvSpPr>
+          <p:nvPr>
+            <p:ph type="body" idx="3" sz="quarter"/>
+          </p:nvPr>
+        </p:nvSpPr>
+        <p:spPr/>
+        <p:txBody>
+          <a:bodyPr/>
+          <a:lstStyle/>
+          <a:p>
+            <a:r>
+              <a:t>Hands-on: module2/examples/reset_patterns/</a:t>
+            </a:r>
+          </a:p>
+        </p:txBody>
+      </p:sp>
+      <p:sp>
+        <p:nvSpPr>
+          <p:cNvPr id="4" name="Slide Number Placeholder 3"/>
+          <p:cNvSpPr>
+            <a:spLocks noGrp="1"/>
+          </p:cNvSpPr>
+          <p:nvPr>
+            <p:ph type="sldNum" idx="5" sz="quarter"/>
+          </p:nvPr>
+        </p:nvSpPr>
+        <p:spPr/>
+      </p:sp>
+    </p:spTree>
+  </p:cSld>
+  <p:clrMapOvr>
+    <a:masterClrMapping/>
+  </p:clrMapOvr>
+</p:notes>
+</file>
+
+<file path=ppt/notesSlides/notesSlide74.xml><?xml version="1.0" encoding="utf-8"?>
+<p:notes xmlns:a="http://schemas.openxmlformats.org/drawingml/2006/main" xmlns:p="http://schemas.openxmlformats.org/presentationml/2006/main" xmlns:r="http://schemas.openxmlformats.org/officeDocument/2006/relationships">
+  <p:cSld>
+    <p:spTree>
+      <p:nvGrpSpPr>
+        <p:cNvPr id="1" name=""/>
+        <p:cNvGrpSpPr/>
+        <p:nvPr/>
+      </p:nvGrpSpPr>
+      <p:grpSpPr>
+        <a:xfrm>
+          <a:off x="0" y="0"/>
+          <a:ext cx="0" cy="0"/>
+          <a:chOff x="0" y="0"/>
+          <a:chExt cx="0" cy="0"/>
+        </a:xfrm>
+      </p:grpSpPr>
+      <p:sp>
+        <p:nvSpPr>
+          <p:cNvPr id="2" name="Slide Image Placeholder 1"/>
+          <p:cNvSpPr>
+            <a:spLocks noGrp="1"/>
+          </p:cNvSpPr>
+          <p:nvPr>
+            <p:ph type="sldImg" idx="2"/>
+          </p:nvPr>
+        </p:nvSpPr>
+        <p:spPr/>
+      </p:sp>
+      <p:sp>
+        <p:nvSpPr>
+          <p:cNvPr id="3" name="Notes Placeholder 2"/>
+          <p:cNvSpPr>
+            <a:spLocks noGrp="1"/>
+          </p:cNvSpPr>
+          <p:nvPr>
+            <p:ph type="body" idx="3" sz="quarter"/>
+          </p:nvPr>
+        </p:nvSpPr>
+        <p:spPr/>
+        <p:txBody>
+          <a:bodyPr/>
+          <a:lstStyle/>
+          <a:p>
+            <a:r>
+              <a:t>module2/examples/signal_access/README.md</a:t>
+            </a:r>
+          </a:p>
+        </p:txBody>
+      </p:sp>
+      <p:sp>
+        <p:nvSpPr>
+          <p:cNvPr id="4" name="Slide Number Placeholder 3"/>
+          <p:cNvSpPr>
+            <a:spLocks noGrp="1"/>
+          </p:cNvSpPr>
+          <p:nvPr>
+            <p:ph type="sldNum" idx="5" sz="quarter"/>
+          </p:nvPr>
+        </p:nvSpPr>
+        <p:spPr/>
+      </p:sp>
+    </p:spTree>
+  </p:cSld>
+  <p:clrMapOvr>
+    <a:masterClrMapping/>
+  </p:clrMapOvr>
+</p:notes>
+</file>
+
+<file path=ppt/notesSlides/notesSlide75.xml><?xml version="1.0" encoding="utf-8"?>
+<p:notes xmlns:a="http://schemas.openxmlformats.org/drawingml/2006/main" xmlns:p="http://schemas.openxmlformats.org/presentationml/2006/main" xmlns:r="http://schemas.openxmlformats.org/officeDocument/2006/relationships">
+  <p:cSld>
+    <p:spTree>
+      <p:nvGrpSpPr>
+        <p:cNvPr id="1" name=""/>
+        <p:cNvGrpSpPr/>
+        <p:nvPr/>
+      </p:nvGrpSpPr>
+      <p:grpSpPr>
+        <a:xfrm>
+          <a:off x="0" y="0"/>
+          <a:ext cx="0" cy="0"/>
+          <a:chOff x="0" y="0"/>
+          <a:chExt cx="0" cy="0"/>
+        </a:xfrm>
+      </p:grpSpPr>
+      <p:sp>
+        <p:nvSpPr>
+          <p:cNvPr id="2" name="Slide Image Placeholder 1"/>
+          <p:cNvSpPr>
+            <a:spLocks noGrp="1"/>
+          </p:cNvSpPr>
+          <p:nvPr>
+            <p:ph type="sldImg" idx="2"/>
+          </p:nvPr>
+        </p:nvSpPr>
+        <p:spPr/>
+      </p:sp>
+      <p:sp>
+        <p:nvSpPr>
+          <p:cNvPr id="3" name="Notes Placeholder 2"/>
+          <p:cNvSpPr>
+            <a:spLocks noGrp="1"/>
+          </p:cNvSpPr>
+          <p:nvPr>
+            <p:ph type="body" idx="3" sz="quarter"/>
+          </p:nvPr>
+        </p:nvSpPr>
+        <p:spPr/>
+        <p:txBody>
+          <a:bodyPr/>
+          <a:lstStyle/>
+          <a:p>
+            <a:r>
+              <a:t>Hands-on: module2/examples/signal_access/</a:t>
+            </a:r>
+          </a:p>
+        </p:txBody>
+      </p:sp>
+      <p:sp>
+        <p:nvSpPr>
+          <p:cNvPr id="4" name="Slide Number Placeholder 3"/>
+          <p:cNvSpPr>
+            <a:spLocks noGrp="1"/>
+          </p:cNvSpPr>
+          <p:nvPr>
+            <p:ph type="sldNum" idx="5" sz="quarter"/>
+          </p:nvPr>
+        </p:nvSpPr>
+        <p:spPr/>
+      </p:sp>
+    </p:spTree>
+  </p:cSld>
+  <p:clrMapOvr>
+    <a:masterClrMapping/>
+  </p:clrMapOvr>
+</p:notes>
+</file>
+
+<file path=ppt/notesSlides/notesSlide76.xml><?xml version="1.0" encoding="utf-8"?>
+<p:notes xmlns:a="http://schemas.openxmlformats.org/drawingml/2006/main" xmlns:p="http://schemas.openxmlformats.org/presentationml/2006/main" xmlns:r="http://schemas.openxmlformats.org/officeDocument/2006/relationships">
+  <p:cSld>
+    <p:spTree>
+      <p:nvGrpSpPr>
+        <p:cNvPr id="1" name=""/>
+        <p:cNvGrpSpPr/>
+        <p:nvPr/>
+      </p:nvGrpSpPr>
+      <p:grpSpPr>
+        <a:xfrm>
+          <a:off x="0" y="0"/>
+          <a:ext cx="0" cy="0"/>
+          <a:chOff x="0" y="0"/>
+          <a:chExt cx="0" cy="0"/>
+        </a:xfrm>
+      </p:grpSpPr>
+      <p:sp>
+        <p:nvSpPr>
+          <p:cNvPr id="2" name="Slide Image Placeholder 1"/>
+          <p:cNvSpPr>
+            <a:spLocks noGrp="1"/>
+          </p:cNvSpPr>
+          <p:nvPr>
+            <p:ph type="sldImg" idx="2"/>
+          </p:nvPr>
+        </p:nvSpPr>
+        <p:spPr/>
+      </p:sp>
+      <p:sp>
+        <p:nvSpPr>
+          <p:cNvPr id="3" name="Notes Placeholder 2"/>
+          <p:cNvSpPr>
+            <a:spLocks noGrp="1"/>
+          </p:cNvSpPr>
+          <p:nvPr>
+            <p:ph type="body" idx="3" sz="quarter"/>
+          </p:nvPr>
+        </p:nvSpPr>
+        <p:spPr/>
+        <p:txBody>
+          <a:bodyPr/>
+          <a:lstStyle/>
+          <a:p>
+            <a:r>
+              <a:t>module2/examples/triggers/README.md</a:t>
+            </a:r>
+          </a:p>
+        </p:txBody>
+      </p:sp>
+      <p:sp>
+        <p:nvSpPr>
+          <p:cNvPr id="4" name="Slide Number Placeholder 3"/>
+          <p:cNvSpPr>
+            <a:spLocks noGrp="1"/>
+          </p:cNvSpPr>
+          <p:nvPr>
+            <p:ph type="sldNum" idx="5" sz="quarter"/>
+          </p:nvPr>
+        </p:nvSpPr>
+        <p:spPr/>
+      </p:sp>
+    </p:spTree>
+  </p:cSld>
+  <p:clrMapOvr>
+    <a:masterClrMapping/>
+  </p:clrMapOvr>
+</p:notes>
+</file>
+
+<file path=ppt/notesSlides/notesSlide77.xml><?xml version="1.0" encoding="utf-8"?>
+<p:notes xmlns:a="http://schemas.openxmlformats.org/drawingml/2006/main" xmlns:p="http://schemas.openxmlformats.org/presentationml/2006/main" xmlns:r="http://schemas.openxmlformats.org/officeDocument/2006/relationships">
+  <p:cSld>
+    <p:spTree>
+      <p:nvGrpSpPr>
+        <p:cNvPr id="1" name=""/>
+        <p:cNvGrpSpPr/>
+        <p:nvPr/>
+      </p:nvGrpSpPr>
+      <p:grpSpPr>
+        <a:xfrm>
+          <a:off x="0" y="0"/>
+          <a:ext cx="0" cy="0"/>
+          <a:chOff x="0" y="0"/>
+          <a:chExt cx="0" cy="0"/>
+        </a:xfrm>
+      </p:grpSpPr>
+      <p:sp>
+        <p:nvSpPr>
+          <p:cNvPr id="2" name="Slide Image Placeholder 1"/>
+          <p:cNvSpPr>
+            <a:spLocks noGrp="1"/>
+          </p:cNvSpPr>
+          <p:nvPr>
+            <p:ph type="sldImg" idx="2"/>
+          </p:nvPr>
+        </p:nvSpPr>
+        <p:spPr/>
+      </p:sp>
+      <p:sp>
+        <p:nvSpPr>
+          <p:cNvPr id="3" name="Notes Placeholder 2"/>
+          <p:cNvSpPr>
+            <a:spLocks noGrp="1"/>
+          </p:cNvSpPr>
+          <p:nvPr>
+            <p:ph type="body" idx="3" sz="quarter"/>
+          </p:nvPr>
+        </p:nvSpPr>
+        <p:spPr/>
+        <p:txBody>
+          <a:bodyPr/>
+          <a:lstStyle/>
+          <a:p>
+            <a:r>
+              <a:t>Hands-on: module2/examples/triggers/</a:t>
+            </a:r>
+          </a:p>
+        </p:txBody>
+      </p:sp>
+      <p:sp>
+        <p:nvSpPr>
+          <p:cNvPr id="4" name="Slide Number Placeholder 3"/>
+          <p:cNvSpPr>
+            <a:spLocks noGrp="1"/>
+          </p:cNvSpPr>
+          <p:nvPr>
+            <p:ph type="sldNum" idx="5" sz="quarter"/>
+          </p:nvPr>
+        </p:nvSpPr>
+        <p:spPr/>
+      </p:sp>
+    </p:spTree>
+  </p:cSld>
+  <p:clrMapOvr>
+    <a:masterClrMapping/>
+  </p:clrMapOvr>
+</p:notes>
+</file>
+
+<file path=ppt/notesSlides/notesSlide78.xml><?xml version="1.0" encoding="utf-8"?>
+<p:notes xmlns:a="http://schemas.openxmlformats.org/drawingml/2006/main" xmlns:p="http://schemas.openxmlformats.org/presentationml/2006/main" xmlns:r="http://schemas.openxmlformats.org/officeDocument/2006/relationships">
+  <p:cSld>
+    <p:spTree>
+      <p:nvGrpSpPr>
+        <p:cNvPr id="1" name=""/>
+        <p:cNvGrpSpPr/>
+        <p:nvPr/>
+      </p:nvGrpSpPr>
+      <p:grpSpPr>
+        <a:xfrm>
+          <a:off x="0" y="0"/>
+          <a:ext cx="0" cy="0"/>
+          <a:chOff x="0" y="0"/>
+          <a:chExt cx="0" cy="0"/>
+        </a:xfrm>
+      </p:grpSpPr>
+      <p:sp>
+        <p:nvSpPr>
+          <p:cNvPr id="2" name="Slide Image Placeholder 1"/>
+          <p:cNvSpPr>
+            <a:spLocks noGrp="1"/>
+          </p:cNvSpPr>
+          <p:nvPr>
+            <p:ph type="sldImg" idx="2"/>
+          </p:nvPr>
+        </p:nvSpPr>
+        <p:spPr/>
+      </p:sp>
+      <p:sp>
+        <p:nvSpPr>
+          <p:cNvPr id="3" name="Notes Placeholder 2"/>
+          <p:cNvSpPr>
+            <a:spLocks noGrp="1"/>
+          </p:cNvSpPr>
+          <p:nvPr>
+            <p:ph type="body" idx="3" sz="quarter"/>
+          </p:nvPr>
+        </p:nvSpPr>
+        <p:spPr/>
+        <p:txBody>
+          <a:bodyPr/>
+          <a:lstStyle/>
+          <a:p>
+            <a:r>
+              <a:t>module2/examples/common_patterns/README.md</a:t>
+            </a:r>
+          </a:p>
+        </p:txBody>
+      </p:sp>
+      <p:sp>
+        <p:nvSpPr>
+          <p:cNvPr id="4" name="Slide Number Placeholder 3"/>
+          <p:cNvSpPr>
+            <a:spLocks noGrp="1"/>
+          </p:cNvSpPr>
+          <p:nvPr>
+            <p:ph type="sldNum" idx="5" sz="quarter"/>
+          </p:nvPr>
+        </p:nvSpPr>
+        <p:spPr/>
+      </p:sp>
+    </p:spTree>
+  </p:cSld>
+  <p:clrMapOvr>
+    <a:masterClrMapping/>
+  </p:clrMapOvr>
+</p:notes>
+</file>
+
+<file path=ppt/notesSlides/notesSlide79.xml><?xml version="1.0" encoding="utf-8"?>
+<p:notes xmlns:a="http://schemas.openxmlformats.org/drawingml/2006/main" xmlns:p="http://schemas.openxmlformats.org/presentationml/2006/main" xmlns:r="http://schemas.openxmlformats.org/officeDocument/2006/relationships">
+  <p:cSld>
+    <p:spTree>
+      <p:nvGrpSpPr>
+        <p:cNvPr id="1" name=""/>
+        <p:cNvGrpSpPr/>
+        <p:nvPr/>
+      </p:nvGrpSpPr>
+      <p:grpSpPr>
+        <a:xfrm>
+          <a:off x="0" y="0"/>
+          <a:ext cx="0" cy="0"/>
+          <a:chOff x="0" y="0"/>
+          <a:chExt cx="0" cy="0"/>
+        </a:xfrm>
+      </p:grpSpPr>
+      <p:sp>
+        <p:nvSpPr>
+          <p:cNvPr id="2" name="Slide Image Placeholder 1"/>
+          <p:cNvSpPr>
+            <a:spLocks noGrp="1"/>
+          </p:cNvSpPr>
+          <p:nvPr>
+            <p:ph type="sldImg" idx="2"/>
+          </p:nvPr>
+        </p:nvSpPr>
+        <p:spPr/>
+      </p:sp>
+      <p:sp>
+        <p:nvSpPr>
+          <p:cNvPr id="3" name="Notes Placeholder 2"/>
+          <p:cNvSpPr>
+            <a:spLocks noGrp="1"/>
+          </p:cNvSpPr>
+          <p:nvPr>
+            <p:ph type="body" idx="3" sz="quarter"/>
+          </p:nvPr>
+        </p:nvSpPr>
+        <p:spPr/>
+        <p:txBody>
+          <a:bodyPr/>
+          <a:lstStyle/>
+          <a:p>
+            <a:r>
+              <a:t>Hands-on: module2/examples/common_patterns/</a:t>
+            </a:r>
+          </a:p>
+        </p:txBody>
+      </p:sp>
+      <p:sp>
+        <p:nvSpPr>
+          <p:cNvPr id="4" name="Slide Number Placeholder 3"/>
+          <p:cNvSpPr>
+            <a:spLocks noGrp="1"/>
+          </p:cNvSpPr>
+          <p:nvPr>
+            <p:ph type="sldNum" idx="5" sz="quarter"/>
+          </p:nvPr>
+        </p:nvSpPr>
+        <p:spPr/>
+      </p:sp>
+    </p:spTree>
+  </p:cSld>
+  <p:clrMapOvr>
+    <a:masterClrMapping/>
+  </p:clrMapOvr>
+</p:notes>
+</file>
+
 <file path=ppt/notesSlides/notesSlide8.xml><?xml version="1.0" encoding="utf-8"?>
 <p:notes xmlns:a="http://schemas.openxmlformats.org/drawingml/2006/main" xmlns:p="http://schemas.openxmlformats.org/presentationml/2006/main" xmlns:r="http://schemas.openxmlformats.org/officeDocument/2006/relationships">
   <p:cSld>
@@ -5273,6 +5985,146 @@
           <a:p>
             <a:r>
               <a:t>From MODULE2 Topics Covered.</a:t>
+            </a:r>
+          </a:p>
+        </p:txBody>
+      </p:sp>
+      <p:sp>
+        <p:nvSpPr>
+          <p:cNvPr id="4" name="Slide Number Placeholder 3"/>
+          <p:cNvSpPr>
+            <a:spLocks noGrp="1"/>
+          </p:cNvSpPr>
+          <p:nvPr>
+            <p:ph type="sldNum" idx="5" sz="quarter"/>
+          </p:nvPr>
+        </p:nvSpPr>
+        <p:spPr/>
+      </p:sp>
+    </p:spTree>
+  </p:cSld>
+  <p:clrMapOvr>
+    <a:masterClrMapping/>
+  </p:clrMapOvr>
+</p:notes>
+</file>
+
+<file path=ppt/notesSlides/notesSlide80.xml><?xml version="1.0" encoding="utf-8"?>
+<p:notes xmlns:a="http://schemas.openxmlformats.org/drawingml/2006/main" xmlns:p="http://schemas.openxmlformats.org/presentationml/2006/main" xmlns:r="http://schemas.openxmlformats.org/officeDocument/2006/relationships">
+  <p:cSld>
+    <p:spTree>
+      <p:nvGrpSpPr>
+        <p:cNvPr id="1" name=""/>
+        <p:cNvGrpSpPr/>
+        <p:nvPr/>
+      </p:nvGrpSpPr>
+      <p:grpSpPr>
+        <a:xfrm>
+          <a:off x="0" y="0"/>
+          <a:ext cx="0" cy="0"/>
+          <a:chOff x="0" y="0"/>
+          <a:chExt cx="0" cy="0"/>
+        </a:xfrm>
+      </p:grpSpPr>
+      <p:sp>
+        <p:nvSpPr>
+          <p:cNvPr id="2" name="Slide Image Placeholder 1"/>
+          <p:cNvSpPr>
+            <a:spLocks noGrp="1"/>
+          </p:cNvSpPr>
+          <p:nvPr>
+            <p:ph type="sldImg" idx="2"/>
+          </p:nvPr>
+        </p:nvSpPr>
+        <p:spPr/>
+      </p:sp>
+      <p:sp>
+        <p:nvSpPr>
+          <p:cNvPr id="3" name="Notes Placeholder 2"/>
+          <p:cNvSpPr>
+            <a:spLocks noGrp="1"/>
+          </p:cNvSpPr>
+          <p:nvPr>
+            <p:ph type="body" idx="3" sz="quarter"/>
+          </p:nvPr>
+        </p:nvSpPr>
+        <p:spPr/>
+        <p:txBody>
+          <a:bodyPr/>
+          <a:lstStyle/>
+          <a:p>
+            <a:r>
+              <a:t>From MODULE2 Learning Outcomes.</a:t>
+            </a:r>
+          </a:p>
+        </p:txBody>
+      </p:sp>
+      <p:sp>
+        <p:nvSpPr>
+          <p:cNvPr id="4" name="Slide Number Placeholder 3"/>
+          <p:cNvSpPr>
+            <a:spLocks noGrp="1"/>
+          </p:cNvSpPr>
+          <p:nvPr>
+            <p:ph type="sldNum" idx="5" sz="quarter"/>
+          </p:nvPr>
+        </p:nvSpPr>
+        <p:spPr/>
+      </p:sp>
+    </p:spTree>
+  </p:cSld>
+  <p:clrMapOvr>
+    <a:masterClrMapping/>
+  </p:clrMapOvr>
+</p:notes>
+</file>
+
+<file path=ppt/notesSlides/notesSlide81.xml><?xml version="1.0" encoding="utf-8"?>
+<p:notes xmlns:a="http://schemas.openxmlformats.org/drawingml/2006/main" xmlns:p="http://schemas.openxmlformats.org/presentationml/2006/main" xmlns:r="http://schemas.openxmlformats.org/officeDocument/2006/relationships">
+  <p:cSld>
+    <p:spTree>
+      <p:nvGrpSpPr>
+        <p:cNvPr id="1" name=""/>
+        <p:cNvGrpSpPr/>
+        <p:nvPr/>
+      </p:nvGrpSpPr>
+      <p:grpSpPr>
+        <a:xfrm>
+          <a:off x="0" y="0"/>
+          <a:ext cx="0" cy="0"/>
+          <a:chOff x="0" y="0"/>
+          <a:chExt cx="0" cy="0"/>
+        </a:xfrm>
+      </p:grpSpPr>
+      <p:sp>
+        <p:nvSpPr>
+          <p:cNvPr id="2" name="Slide Image Placeholder 1"/>
+          <p:cNvSpPr>
+            <a:spLocks noGrp="1"/>
+          </p:cNvSpPr>
+          <p:nvPr>
+            <p:ph type="sldImg" idx="2"/>
+          </p:nvPr>
+        </p:nvSpPr>
+        <p:spPr/>
+      </p:sp>
+      <p:sp>
+        <p:nvSpPr>
+          <p:cNvPr id="3" name="Notes Placeholder 2"/>
+          <p:cNvSpPr>
+            <a:spLocks noGrp="1"/>
+          </p:cNvSpPr>
+          <p:nvPr>
+            <p:ph type="body" idx="3" sz="quarter"/>
+          </p:nvPr>
+        </p:nvSpPr>
+        <p:spPr/>
+        <p:txBody>
+          <a:bodyPr/>
+          <a:lstStyle/>
+          <a:p>
+            <a:r>
+              <a:t>From MODULE2 Learning Outcomes.</a:t>
             </a:r>
           </a:p>
         </p:txBody>
@@ -25086,7 +25938,7 @@
               </a:defRPr>
             </a:pPr>
             <a:r>
-              <a:t>$ ./scripts/module2.sh --check</a:t>
+              <a:t>$ ./scripts/module2.sh --clock-generation</a:t>
             </a:r>
           </a:p>
         </p:txBody>
@@ -25320,8 +26172,8 @@
         </p:nvSpPr>
         <p:spPr>
           <a:xfrm>
-            <a:off x="548640" y="2743200"/>
-            <a:ext cx="11064240" cy="1371600"/>
+            <a:off x="548640" y="411480"/>
+            <a:ext cx="11064240" cy="777240"/>
           </a:xfrm>
           <a:prstGeom prst="rect">
             <a:avLst/>
@@ -25334,11 +26186,11 @@
           </a:bodyPr>
           <a:lstStyle/>
           <a:p>
-            <a:pPr algn="ctr">
-              <a:lnSpc>
-                <a:spcPts val="2200"/>
-              </a:lnSpc>
-              <a:defRPr sz="3600" b="1">
+            <a:pPr>
+              <a:lnSpc>
+                <a:spcPts val="2200"/>
+              </a:lnSpc>
+              <a:defRPr sz="2800" b="1">
                 <a:solidFill>
                   <a:srgbClr val="1A1A2E"/>
                 </a:solidFill>
@@ -25346,7 +26198,7 @@
               </a:defRPr>
             </a:pPr>
             <a:r>
-              <a:t>Practice &amp; assessment</a:t>
+              <a:t>Example 1: Clock Generation</a:t>
             </a:r>
           </a:p>
         </p:txBody>
@@ -25354,6 +26206,143 @@
       <p:sp>
         <p:nvSpPr>
           <p:cNvPr id="3" name="TextBox 2"/>
+          <p:cNvSpPr txBox="1"/>
+          <p:nvPr/>
+        </p:nvSpPr>
+        <p:spPr>
+          <a:xfrm>
+            <a:off x="548640" y="1234440"/>
+            <a:ext cx="11064240" cy="4937760"/>
+          </a:xfrm>
+          <a:prstGeom prst="rect">
+            <a:avLst/>
+          </a:prstGeom>
+          <a:noFill/>
+        </p:spPr>
+        <p:txBody>
+          <a:bodyPr wrap="square">
+            <a:noAutofit/>
+          </a:bodyPr>
+          <a:lstStyle/>
+          <a:p>
+            <a:pPr>
+              <a:lnSpc>
+                <a:spcPts val="2200"/>
+              </a:lnSpc>
+              <a:spcAft>
+                <a:spcPts val="1000"/>
+              </a:spcAft>
+              <a:defRPr sz="2000" b="0">
+                <a:solidFill>
+                  <a:srgbClr val="333333"/>
+                </a:solidFill>
+                <a:latin typeface="Calibri"/>
+              </a:defRPr>
+            </a:pPr>
+            <a:r>
+              <a:t>• Simple Clock: Basic clock generation with `always`</a:t>
+            </a:r>
+          </a:p>
+          <a:p>
+            <a:pPr>
+              <a:lnSpc>
+                <a:spcPts val="2200"/>
+              </a:lnSpc>
+              <a:spcAft>
+                <a:spcPts val="1000"/>
+              </a:spcAft>
+              <a:defRPr sz="2000" b="0">
+                <a:solidFill>
+                  <a:srgbClr val="333333"/>
+                </a:solidFill>
+                <a:latin typeface="Calibri"/>
+              </a:defRPr>
+            </a:pPr>
+            <a:r>
+              <a:t>      block</a:t>
+            </a:r>
+          </a:p>
+          <a:p>
+            <a:pPr>
+              <a:lnSpc>
+                <a:spcPts val="2200"/>
+              </a:lnSpc>
+              <a:spcAft>
+                <a:spcPts val="1000"/>
+              </a:spcAft>
+              <a:defRPr sz="2000" b="0">
+                <a:solidFill>
+                  <a:srgbClr val="333333"/>
+                </a:solidFill>
+                <a:latin typeface="Calibri"/>
+              </a:defRPr>
+            </a:pPr>
+            <a:r>
+              <a:t>• Parameterized Clock: Clock with configurable period</a:t>
+            </a:r>
+          </a:p>
+          <a:p>
+            <a:pPr>
+              <a:lnSpc>
+                <a:spcPts val="2200"/>
+              </a:lnSpc>
+              <a:spcAft>
+                <a:spcPts val="1000"/>
+              </a:spcAft>
+              <a:defRPr sz="2000" b="0">
+                <a:solidFill>
+                  <a:srgbClr val="333333"/>
+                </a:solidFill>
+                <a:latin typeface="Calibri"/>
+              </a:defRPr>
+            </a:pPr>
+            <a:r>
+              <a:t>      and duty cycle</a:t>
+            </a:r>
+          </a:p>
+          <a:p>
+            <a:pPr>
+              <a:lnSpc>
+                <a:spcPts val="2200"/>
+              </a:lnSpc>
+              <a:spcAft>
+                <a:spcPts val="1000"/>
+              </a:spcAft>
+              <a:defRPr sz="2000" b="0">
+                <a:solidFill>
+                  <a:srgbClr val="333333"/>
+                </a:solidFill>
+                <a:latin typeface="Calibri"/>
+              </a:defRPr>
+            </a:pPr>
+            <a:r>
+              <a:t>• Multiple Clocks: Generating multiple independent</a:t>
+            </a:r>
+          </a:p>
+          <a:p>
+            <a:pPr>
+              <a:lnSpc>
+                <a:spcPts val="2200"/>
+              </a:lnSpc>
+              <a:spcAft>
+                <a:spcPts val="1000"/>
+              </a:spcAft>
+              <a:defRPr sz="2000" b="0">
+                <a:solidFill>
+                  <a:srgbClr val="333333"/>
+                </a:solidFill>
+                <a:latin typeface="Calibri"/>
+              </a:defRPr>
+            </a:pPr>
+            <a:r>
+              <a:t>      clocks</a:t>
+            </a:r>
+          </a:p>
+        </p:txBody>
+      </p:sp>
+      <p:sp>
+        <p:nvSpPr>
+          <p:cNvPr id="4" name="TextBox 3"/>
           <p:cNvSpPr txBox="1"/>
           <p:nvPr/>
         </p:nvSpPr>
@@ -25442,7 +26431,7 @@
               </a:defRPr>
             </a:pPr>
             <a:r>
-              <a:t>Exercises</a:t>
+              <a:t>Demo: Clock Generation</a:t>
             </a:r>
           </a:p>
         </p:txBody>
@@ -25455,13 +26444,15 @@
         </p:nvSpPr>
         <p:spPr>
           <a:xfrm>
-            <a:off x="548640" y="1234440"/>
-            <a:ext cx="11064240" cy="4937760"/>
+            <a:off x="548640" y="1051560"/>
+            <a:ext cx="11064240" cy="914400"/>
           </a:xfrm>
           <a:prstGeom prst="rect">
             <a:avLst/>
           </a:prstGeom>
-          <a:noFill/>
+          <a:solidFill>
+            <a:srgbClr val="F4F4F4"/>
+          </a:solidFill>
         </p:spPr>
         <p:txBody>
           <a:bodyPr wrap="square">
@@ -25474,100 +26465,48 @@
                 <a:spcPts val="2200"/>
               </a:lnSpc>
               <a:spcAft>
-                <a:spcPts val="1000"/>
-              </a:spcAft>
-              <a:defRPr sz="2000" b="0">
-                <a:solidFill>
-                  <a:srgbClr val="333333"/>
-                </a:solidFill>
-                <a:latin typeface="Calibri"/>
-              </a:defRPr>
-            </a:pPr>
-            <a:r>
-              <a:t>• Clock Generation</a:t>
-            </a:r>
-          </a:p>
-          <a:p>
-            <a:pPr>
-              <a:lnSpc>
-                <a:spcPts val="2200"/>
-              </a:lnSpc>
-              <a:spcAft>
-                <a:spcPts val="1000"/>
-              </a:spcAft>
-              <a:defRPr sz="2000" b="0">
-                <a:solidFill>
-                  <a:srgbClr val="333333"/>
-                </a:solidFill>
-                <a:latin typeface="Calibri"/>
-              </a:defRPr>
-            </a:pPr>
-            <a:r>
-              <a:t>• Reset Implementation</a:t>
-            </a:r>
-          </a:p>
-          <a:p>
-            <a:pPr>
-              <a:lnSpc>
-                <a:spcPts val="2200"/>
-              </a:lnSpc>
-              <a:spcAft>
-                <a:spcPts val="1000"/>
-              </a:spcAft>
-              <a:defRPr sz="2000" b="0">
-                <a:solidFill>
-                  <a:srgbClr val="333333"/>
-                </a:solidFill>
-                <a:latin typeface="Calibri"/>
-              </a:defRPr>
-            </a:pPr>
-            <a:r>
-              <a:t>• Signal Access</a:t>
-            </a:r>
-          </a:p>
-          <a:p>
-            <a:pPr>
-              <a:lnSpc>
-                <a:spcPts val="2200"/>
-              </a:lnSpc>
-              <a:spcAft>
-                <a:spcPts val="1000"/>
-              </a:spcAft>
-              <a:defRPr sz="2000" b="0">
-                <a:solidFill>
-                  <a:srgbClr val="333333"/>
-                </a:solidFill>
-                <a:latin typeface="Calibri"/>
-              </a:defRPr>
-            </a:pPr>
-            <a:r>
-              <a:t>• Timing Control</a:t>
-            </a:r>
-          </a:p>
-          <a:p>
-            <a:pPr>
-              <a:lnSpc>
-                <a:spcPts val="2200"/>
-              </a:lnSpc>
-              <a:spcAft>
-                <a:spcPts val="1000"/>
-              </a:spcAft>
-              <a:defRPr sz="2000" b="0">
-                <a:solidFill>
-                  <a:srgbClr val="333333"/>
-                </a:solidFill>
-                <a:latin typeface="Calibri"/>
-              </a:defRPr>
-            </a:pPr>
-            <a:r>
-              <a:t>• Testbench Patterns</a:t>
-            </a:r>
-          </a:p>
-        </p:txBody>
-      </p:sp>
-      <p:sp>
-        <p:nvSpPr>
-          <p:cNvPr id="4" name="TextBox 3"/>
+                <a:spcPts val="200"/>
+              </a:spcAft>
+              <a:defRPr sz="2000" b="0">
+                <a:solidFill>
+                  <a:srgbClr val="333333"/>
+                </a:solidFill>
+                <a:latin typeface="Consolas"/>
+              </a:defRPr>
+            </a:pPr>
+            <a:r>
+              <a:t>$ ./scripts/module2.sh --clock-generation</a:t>
+            </a:r>
+          </a:p>
+        </p:txBody>
+      </p:sp>
+      <p:pic>
+        <p:nvPicPr>
+          <p:cNvPr id="4" name="Picture 3" descr="ex01_clock_generation.png"/>
+          <p:cNvPicPr>
+            <a:picLocks noChangeAspect="1"/>
+          </p:cNvPicPr>
+          <p:nvPr/>
+        </p:nvPicPr>
+        <p:blipFill>
+          <a:blip r:embed="rId2"/>
+          <a:stretch>
+            <a:fillRect/>
+          </a:stretch>
+        </p:blipFill>
+        <p:spPr>
+          <a:xfrm>
+            <a:off x="548640" y="1965960"/>
+            <a:ext cx="7071358" cy="3977639"/>
+          </a:xfrm>
+          <a:prstGeom prst="rect">
+            <a:avLst/>
+          </a:prstGeom>
+        </p:spPr>
+      </p:pic>
+      <p:sp>
+        <p:nvSpPr>
+          <p:cNvPr id="5" name="TextBox 4"/>
           <p:cNvSpPr txBox="1"/>
           <p:nvPr/>
         </p:nvSpPr>
@@ -25889,7 +26828,7 @@
               </a:defRPr>
             </a:pPr>
             <a:r>
-              <a:t>Assessment checklist</a:t>
+              <a:t>Example 2: Reset Patterns</a:t>
             </a:r>
           </a:p>
         </p:txBody>
@@ -25931,102 +26870,64 @@
               </a:defRPr>
             </a:pPr>
             <a:r>
-              <a:t>• Can generate clocks and manage clock domains</a:t>
-            </a:r>
-          </a:p>
-          <a:p>
-            <a:pPr>
-              <a:lnSpc>
-                <a:spcPts val="2200"/>
-              </a:lnSpc>
-              <a:spcAft>
-                <a:spcPts val="1000"/>
-              </a:spcAft>
-              <a:defRPr sz="2000" b="0">
-                <a:solidFill>
-                  <a:srgbClr val="333333"/>
-                </a:solidFill>
-                <a:latin typeface="Calibri"/>
-              </a:defRPr>
-            </a:pPr>
-            <a:r>
-              <a:t>• Can implement reset patterns</a:t>
-            </a:r>
-          </a:p>
-          <a:p>
-            <a:pPr>
-              <a:lnSpc>
-                <a:spcPts val="2200"/>
-              </a:lnSpc>
-              <a:spcAft>
-                <a:spcPts val="1000"/>
-              </a:spcAft>
-              <a:defRPr sz="2000" b="0">
-                <a:solidFill>
-                  <a:srgbClr val="333333"/>
-                </a:solidFill>
-                <a:latin typeface="Calibri"/>
-              </a:defRPr>
-            </a:pPr>
-            <a:r>
-              <a:t>• Can access and drive signals correctly</a:t>
-            </a:r>
-          </a:p>
-          <a:p>
-            <a:pPr>
-              <a:lnSpc>
-                <a:spcPts val="2200"/>
-              </a:lnSpc>
-              <a:spcAft>
-                <a:spcPts val="1000"/>
-              </a:spcAft>
-              <a:defRPr sz="2000" b="0">
-                <a:solidFill>
-                  <a:srgbClr val="333333"/>
-                </a:solidFill>
-                <a:latin typeface="Calibri"/>
-              </a:defRPr>
-            </a:pPr>
-            <a:r>
-              <a:t>• Can use events and timing control</a:t>
-            </a:r>
-          </a:p>
-          <a:p>
-            <a:pPr>
-              <a:lnSpc>
-                <a:spcPts val="2200"/>
-              </a:lnSpc>
-              <a:spcAft>
-                <a:spcPts val="1000"/>
-              </a:spcAft>
-              <a:defRPr sz="2000" b="0">
-                <a:solidFill>
-                  <a:srgbClr val="333333"/>
-                </a:solidFill>
-                <a:latin typeface="Calibri"/>
-              </a:defRPr>
-            </a:pPr>
-            <a:r>
-              <a:t>• Can apply common verification patterns</a:t>
-            </a:r>
-          </a:p>
-          <a:p>
-            <a:pPr>
-              <a:lnSpc>
-                <a:spcPts val="2200"/>
-              </a:lnSpc>
-              <a:spcAft>
-                <a:spcPts val="1000"/>
-              </a:spcAft>
-              <a:defRPr sz="2000" b="0">
-                <a:solidFill>
-                  <a:srgbClr val="333333"/>
-                </a:solidFill>
-                <a:latin typeface="Calibri"/>
-              </a:defRPr>
-            </a:pPr>
-            <a:r>
-              <a:t>• Can structure testbenches effectively</a:t>
+              <a:t>• Synchronous Reset: Reset synchronized to clock</a:t>
+            </a:r>
+          </a:p>
+          <a:p>
+            <a:pPr>
+              <a:lnSpc>
+                <a:spcPts val="2200"/>
+              </a:lnSpc>
+              <a:spcAft>
+                <a:spcPts val="1000"/>
+              </a:spcAft>
+              <a:defRPr sz="2000" b="0">
+                <a:solidFill>
+                  <a:srgbClr val="333333"/>
+                </a:solidFill>
+                <a:latin typeface="Calibri"/>
+              </a:defRPr>
+            </a:pPr>
+            <a:r>
+              <a:t>• Asynchronous Reset: Reset independent of clock</a:t>
+            </a:r>
+          </a:p>
+          <a:p>
+            <a:pPr>
+              <a:lnSpc>
+                <a:spcPts val="2200"/>
+              </a:lnSpc>
+              <a:spcAft>
+                <a:spcPts val="1000"/>
+              </a:spcAft>
+              <a:defRPr sz="2000" b="0">
+                <a:solidFill>
+                  <a:srgbClr val="333333"/>
+                </a:solidFill>
+                <a:latin typeface="Calibri"/>
+              </a:defRPr>
+            </a:pPr>
+            <a:r>
+              <a:t>• Reset Sequence: Controlled reset assertion and de-</a:t>
+            </a:r>
+          </a:p>
+          <a:p>
+            <a:pPr>
+              <a:lnSpc>
+                <a:spcPts val="2200"/>
+              </a:lnSpc>
+              <a:spcAft>
+                <a:spcPts val="1000"/>
+              </a:spcAft>
+              <a:defRPr sz="2000" b="0">
+                <a:solidFill>
+                  <a:srgbClr val="333333"/>
+                </a:solidFill>
+                <a:latin typeface="Calibri"/>
+              </a:defRPr>
+            </a:pPr>
+            <a:r>
+              <a:t>      assertion</a:t>
             </a:r>
           </a:p>
         </p:txBody>
@@ -26122,7 +27023,7 @@
               </a:defRPr>
             </a:pPr>
             <a:r>
-              <a:t>Summary &amp; next steps</a:t>
+              <a:t>Demo: Reset Patterns</a:t>
             </a:r>
           </a:p>
         </p:txBody>
@@ -26135,8 +27036,76 @@
         </p:nvSpPr>
         <p:spPr>
           <a:xfrm>
-            <a:off x="548640" y="1234440"/>
-            <a:ext cx="11064240" cy="4937760"/>
+            <a:off x="548640" y="1051560"/>
+            <a:ext cx="11064240" cy="914400"/>
+          </a:xfrm>
+          <a:prstGeom prst="rect">
+            <a:avLst/>
+          </a:prstGeom>
+          <a:solidFill>
+            <a:srgbClr val="F4F4F4"/>
+          </a:solidFill>
+        </p:spPr>
+        <p:txBody>
+          <a:bodyPr wrap="square">
+            <a:noAutofit/>
+          </a:bodyPr>
+          <a:lstStyle/>
+          <a:p>
+            <a:pPr>
+              <a:lnSpc>
+                <a:spcPts val="2200"/>
+              </a:lnSpc>
+              <a:spcAft>
+                <a:spcPts val="200"/>
+              </a:spcAft>
+              <a:defRPr sz="2000" b="0">
+                <a:solidFill>
+                  <a:srgbClr val="333333"/>
+                </a:solidFill>
+                <a:latin typeface="Consolas"/>
+              </a:defRPr>
+            </a:pPr>
+            <a:r>
+              <a:t>$ ./scripts/module2.sh --reset-patterns</a:t>
+            </a:r>
+          </a:p>
+        </p:txBody>
+      </p:sp>
+      <p:pic>
+        <p:nvPicPr>
+          <p:cNvPr id="4" name="Picture 3" descr="ex02_reset_patterns.png"/>
+          <p:cNvPicPr>
+            <a:picLocks noChangeAspect="1"/>
+          </p:cNvPicPr>
+          <p:nvPr/>
+        </p:nvPicPr>
+        <p:blipFill>
+          <a:blip r:embed="rId2"/>
+          <a:stretch>
+            <a:fillRect/>
+          </a:stretch>
+        </p:blipFill>
+        <p:spPr>
+          <a:xfrm>
+            <a:off x="548640" y="1965960"/>
+            <a:ext cx="7071358" cy="3977639"/>
+          </a:xfrm>
+          <a:prstGeom prst="rect">
+            <a:avLst/>
+          </a:prstGeom>
+        </p:spPr>
+      </p:pic>
+      <p:sp>
+        <p:nvSpPr>
+          <p:cNvPr id="5" name="TextBox 4"/>
+          <p:cNvSpPr txBox="1"/>
+          <p:nvPr/>
+        </p:nvSpPr>
+        <p:spPr>
+          <a:xfrm>
+            <a:off x="548640" y="6355080"/>
+            <a:ext cx="11064240" cy="320040"/>
           </a:xfrm>
           <a:prstGeom prst="rect">
             <a:avLst/>
@@ -26149,79 +27118,1348 @@
           </a:bodyPr>
           <a:lstStyle/>
           <a:p>
-            <a:pPr>
-              <a:lnSpc>
-                <a:spcPts val="2200"/>
-              </a:lnSpc>
-              <a:spcAft>
-                <a:spcPts val="1000"/>
-              </a:spcAft>
-              <a:defRPr sz="2000" b="0">
-                <a:solidFill>
-                  <a:srgbClr val="333333"/>
-                </a:solidFill>
-                <a:latin typeface="Calibri"/>
-              </a:defRPr>
-            </a:pPr>
-            <a:r>
-              <a:t>• Master SystemVerilog testbench construction</a:t>
-            </a:r>
-          </a:p>
-          <a:p>
-            <a:pPr>
-              <a:lnSpc>
-                <a:spcPts val="2200"/>
-              </a:lnSpc>
-              <a:spcAft>
-                <a:spcPts val="1000"/>
-              </a:spcAft>
-              <a:defRPr sz="2000" b="0">
-                <a:solidFill>
-                  <a:srgbClr val="333333"/>
-                </a:solidFill>
-                <a:latin typeface="Calibri"/>
-              </a:defRPr>
-            </a:pPr>
-            <a:r>
-              <a:t>• Complete module2/CHECKLIST.md</a:t>
-            </a:r>
-          </a:p>
-          <a:p>
-            <a:pPr>
-              <a:lnSpc>
-                <a:spcPts val="2200"/>
-              </a:lnSpc>
-              <a:spcAft>
-                <a:spcPts val="1000"/>
-              </a:spcAft>
-              <a:defRPr sz="2000" b="0">
-                <a:solidFill>
-                  <a:srgbClr val="333333"/>
-                </a:solidFill>
-                <a:latin typeface="Calibri"/>
-              </a:defRPr>
-            </a:pPr>
-            <a:r>
-              <a:t>• Run ./scripts/module2.sh --check</a:t>
-            </a:r>
-          </a:p>
-          <a:p>
-            <a:pPr>
-              <a:lnSpc>
-                <a:spcPts val="2200"/>
-              </a:lnSpc>
-              <a:spcAft>
-                <a:spcPts val="1000"/>
-              </a:spcAft>
-              <a:defRPr sz="2000" b="0">
-                <a:solidFill>
-                  <a:srgbClr val="333333"/>
-                </a:solidFill>
-                <a:latin typeface="Calibri"/>
-              </a:defRPr>
-            </a:pPr>
-            <a:r>
-              <a:t>• Next: Next module in course</a:t>
+            <a:pPr algn="r">
+              <a:lnSpc>
+                <a:spcPts val="2200"/>
+              </a:lnSpc>
+              <a:defRPr sz="1000" b="0">
+                <a:solidFill>
+                  <a:srgbClr val="666666"/>
+                </a:solidFill>
+                <a:latin typeface="Calibri"/>
+              </a:defRPr>
+            </a:pPr>
+            <a:r>
+              <a:t>learn_uvm2017_sv_verilator / Module 2</a:t>
+            </a:r>
+          </a:p>
+        </p:txBody>
+      </p:sp>
+    </p:spTree>
+  </p:cSld>
+  <p:clrMapOvr>
+    <a:masterClrMapping/>
+  </p:clrMapOvr>
+</p:sld>
+</file>
+
+<file path=ppt/slides/slide82.xml><?xml version="1.0" encoding="utf-8"?>
+<p:sld xmlns:a="http://schemas.openxmlformats.org/drawingml/2006/main" xmlns:p="http://schemas.openxmlformats.org/presentationml/2006/main" xmlns:r="http://schemas.openxmlformats.org/officeDocument/2006/relationships">
+  <p:cSld>
+    <p:spTree>
+      <p:nvGrpSpPr>
+        <p:cNvPr id="1" name=""/>
+        <p:cNvGrpSpPr/>
+        <p:nvPr/>
+      </p:nvGrpSpPr>
+      <p:grpSpPr/>
+      <p:sp>
+        <p:nvSpPr>
+          <p:cNvPr id="2" name="TextBox 1"/>
+          <p:cNvSpPr txBox="1"/>
+          <p:nvPr/>
+        </p:nvSpPr>
+        <p:spPr>
+          <a:xfrm>
+            <a:off x="548640" y="411480"/>
+            <a:ext cx="11064240" cy="777240"/>
+          </a:xfrm>
+          <a:prstGeom prst="rect">
+            <a:avLst/>
+          </a:prstGeom>
+          <a:noFill/>
+        </p:spPr>
+        <p:txBody>
+          <a:bodyPr wrap="square">
+            <a:noAutofit/>
+          </a:bodyPr>
+          <a:lstStyle/>
+          <a:p>
+            <a:pPr>
+              <a:lnSpc>
+                <a:spcPts val="2200"/>
+              </a:lnSpc>
+              <a:defRPr sz="2800" b="1">
+                <a:solidFill>
+                  <a:srgbClr val="1A1A2E"/>
+                </a:solidFill>
+                <a:latin typeface="Calibri"/>
+              </a:defRPr>
+            </a:pPr>
+            <a:r>
+              <a:t>Example 3: Signal Access</a:t>
+            </a:r>
+          </a:p>
+        </p:txBody>
+      </p:sp>
+      <p:sp>
+        <p:nvSpPr>
+          <p:cNvPr id="3" name="TextBox 2"/>
+          <p:cNvSpPr txBox="1"/>
+          <p:nvPr/>
+        </p:nvSpPr>
+        <p:spPr>
+          <a:xfrm>
+            <a:off x="548640" y="1234440"/>
+            <a:ext cx="11064240" cy="4937760"/>
+          </a:xfrm>
+          <a:prstGeom prst="rect">
+            <a:avLst/>
+          </a:prstGeom>
+          <a:noFill/>
+        </p:spPr>
+        <p:txBody>
+          <a:bodyPr wrap="square">
+            <a:noAutofit/>
+          </a:bodyPr>
+          <a:lstStyle/>
+          <a:p>
+            <a:pPr>
+              <a:lnSpc>
+                <a:spcPts val="2200"/>
+              </a:lnSpc>
+              <a:spcAft>
+                <a:spcPts val="1000"/>
+              </a:spcAft>
+              <a:defRPr sz="2000" b="0">
+                <a:solidFill>
+                  <a:srgbClr val="333333"/>
+                </a:solidFill>
+                <a:latin typeface="Calibri"/>
+              </a:defRPr>
+            </a:pPr>
+            <a:r>
+              <a:t>• Signal Reading: Reading DUT signal values</a:t>
+            </a:r>
+          </a:p>
+          <a:p>
+            <a:pPr>
+              <a:lnSpc>
+                <a:spcPts val="2200"/>
+              </a:lnSpc>
+              <a:spcAft>
+                <a:spcPts val="1000"/>
+              </a:spcAft>
+              <a:defRPr sz="2000" b="0">
+                <a:solidFill>
+                  <a:srgbClr val="333333"/>
+                </a:solidFill>
+                <a:latin typeface="Calibri"/>
+              </a:defRPr>
+            </a:pPr>
+            <a:r>
+              <a:t>• Signal Driving: Driving signals to DUT</a:t>
+            </a:r>
+          </a:p>
+          <a:p>
+            <a:pPr>
+              <a:lnSpc>
+                <a:spcPts val="2200"/>
+              </a:lnSpc>
+              <a:spcAft>
+                <a:spcPts val="1000"/>
+              </a:spcAft>
+              <a:defRPr sz="2000" b="0">
+                <a:solidFill>
+                  <a:srgbClr val="333333"/>
+                </a:solidFill>
+                <a:latin typeface="Calibri"/>
+              </a:defRPr>
+            </a:pPr>
+            <a:r>
+              <a:t>• Signal Monitoring: Monitoring signal changes</a:t>
+            </a:r>
+          </a:p>
+        </p:txBody>
+      </p:sp>
+      <p:sp>
+        <p:nvSpPr>
+          <p:cNvPr id="4" name="TextBox 3"/>
+          <p:cNvSpPr txBox="1"/>
+          <p:nvPr/>
+        </p:nvSpPr>
+        <p:spPr>
+          <a:xfrm>
+            <a:off x="548640" y="6355080"/>
+            <a:ext cx="11064240" cy="320040"/>
+          </a:xfrm>
+          <a:prstGeom prst="rect">
+            <a:avLst/>
+          </a:prstGeom>
+          <a:noFill/>
+        </p:spPr>
+        <p:txBody>
+          <a:bodyPr wrap="square">
+            <a:noAutofit/>
+          </a:bodyPr>
+          <a:lstStyle/>
+          <a:p>
+            <a:pPr algn="r">
+              <a:lnSpc>
+                <a:spcPts val="2200"/>
+              </a:lnSpc>
+              <a:defRPr sz="1000" b="0">
+                <a:solidFill>
+                  <a:srgbClr val="666666"/>
+                </a:solidFill>
+                <a:latin typeface="Calibri"/>
+              </a:defRPr>
+            </a:pPr>
+            <a:r>
+              <a:t>learn_uvm2017_sv_verilator / Module 2</a:t>
+            </a:r>
+          </a:p>
+        </p:txBody>
+      </p:sp>
+    </p:spTree>
+  </p:cSld>
+  <p:clrMapOvr>
+    <a:masterClrMapping/>
+  </p:clrMapOvr>
+</p:sld>
+</file>
+
+<file path=ppt/slides/slide83.xml><?xml version="1.0" encoding="utf-8"?>
+<p:sld xmlns:a="http://schemas.openxmlformats.org/drawingml/2006/main" xmlns:p="http://schemas.openxmlformats.org/presentationml/2006/main" xmlns:r="http://schemas.openxmlformats.org/officeDocument/2006/relationships">
+  <p:cSld>
+    <p:spTree>
+      <p:nvGrpSpPr>
+        <p:cNvPr id="1" name=""/>
+        <p:cNvGrpSpPr/>
+        <p:nvPr/>
+      </p:nvGrpSpPr>
+      <p:grpSpPr/>
+      <p:sp>
+        <p:nvSpPr>
+          <p:cNvPr id="2" name="TextBox 1"/>
+          <p:cNvSpPr txBox="1"/>
+          <p:nvPr/>
+        </p:nvSpPr>
+        <p:spPr>
+          <a:xfrm>
+            <a:off x="548640" y="411480"/>
+            <a:ext cx="11064240" cy="777240"/>
+          </a:xfrm>
+          <a:prstGeom prst="rect">
+            <a:avLst/>
+          </a:prstGeom>
+          <a:noFill/>
+        </p:spPr>
+        <p:txBody>
+          <a:bodyPr wrap="square">
+            <a:noAutofit/>
+          </a:bodyPr>
+          <a:lstStyle/>
+          <a:p>
+            <a:pPr>
+              <a:lnSpc>
+                <a:spcPts val="2200"/>
+              </a:lnSpc>
+              <a:defRPr sz="2800" b="1">
+                <a:solidFill>
+                  <a:srgbClr val="1A1A2E"/>
+                </a:solidFill>
+                <a:latin typeface="Calibri"/>
+              </a:defRPr>
+            </a:pPr>
+            <a:r>
+              <a:t>Demo: Signal Access</a:t>
+            </a:r>
+          </a:p>
+        </p:txBody>
+      </p:sp>
+      <p:sp>
+        <p:nvSpPr>
+          <p:cNvPr id="3" name="TextBox 2"/>
+          <p:cNvSpPr txBox="1"/>
+          <p:nvPr/>
+        </p:nvSpPr>
+        <p:spPr>
+          <a:xfrm>
+            <a:off x="548640" y="1051560"/>
+            <a:ext cx="11064240" cy="914400"/>
+          </a:xfrm>
+          <a:prstGeom prst="rect">
+            <a:avLst/>
+          </a:prstGeom>
+          <a:solidFill>
+            <a:srgbClr val="F4F4F4"/>
+          </a:solidFill>
+        </p:spPr>
+        <p:txBody>
+          <a:bodyPr wrap="square">
+            <a:noAutofit/>
+          </a:bodyPr>
+          <a:lstStyle/>
+          <a:p>
+            <a:pPr>
+              <a:lnSpc>
+                <a:spcPts val="2200"/>
+              </a:lnSpc>
+              <a:spcAft>
+                <a:spcPts val="200"/>
+              </a:spcAft>
+              <a:defRPr sz="2000" b="0">
+                <a:solidFill>
+                  <a:srgbClr val="333333"/>
+                </a:solidFill>
+                <a:latin typeface="Consolas"/>
+              </a:defRPr>
+            </a:pPr>
+            <a:r>
+              <a:t>$ ./scripts/module2.sh --signal-access</a:t>
+            </a:r>
+          </a:p>
+        </p:txBody>
+      </p:sp>
+      <p:pic>
+        <p:nvPicPr>
+          <p:cNvPr id="4" name="Picture 3" descr="ex03_signal_access.png"/>
+          <p:cNvPicPr>
+            <a:picLocks noChangeAspect="1"/>
+          </p:cNvPicPr>
+          <p:nvPr/>
+        </p:nvPicPr>
+        <p:blipFill>
+          <a:blip r:embed="rId2"/>
+          <a:stretch>
+            <a:fillRect/>
+          </a:stretch>
+        </p:blipFill>
+        <p:spPr>
+          <a:xfrm>
+            <a:off x="548640" y="1965960"/>
+            <a:ext cx="7071358" cy="3977639"/>
+          </a:xfrm>
+          <a:prstGeom prst="rect">
+            <a:avLst/>
+          </a:prstGeom>
+        </p:spPr>
+      </p:pic>
+      <p:sp>
+        <p:nvSpPr>
+          <p:cNvPr id="5" name="TextBox 4"/>
+          <p:cNvSpPr txBox="1"/>
+          <p:nvPr/>
+        </p:nvSpPr>
+        <p:spPr>
+          <a:xfrm>
+            <a:off x="548640" y="6355080"/>
+            <a:ext cx="11064240" cy="320040"/>
+          </a:xfrm>
+          <a:prstGeom prst="rect">
+            <a:avLst/>
+          </a:prstGeom>
+          <a:noFill/>
+        </p:spPr>
+        <p:txBody>
+          <a:bodyPr wrap="square">
+            <a:noAutofit/>
+          </a:bodyPr>
+          <a:lstStyle/>
+          <a:p>
+            <a:pPr algn="r">
+              <a:lnSpc>
+                <a:spcPts val="2200"/>
+              </a:lnSpc>
+              <a:defRPr sz="1000" b="0">
+                <a:solidFill>
+                  <a:srgbClr val="666666"/>
+                </a:solidFill>
+                <a:latin typeface="Calibri"/>
+              </a:defRPr>
+            </a:pPr>
+            <a:r>
+              <a:t>learn_uvm2017_sv_verilator / Module 2</a:t>
+            </a:r>
+          </a:p>
+        </p:txBody>
+      </p:sp>
+    </p:spTree>
+  </p:cSld>
+  <p:clrMapOvr>
+    <a:masterClrMapping/>
+  </p:clrMapOvr>
+</p:sld>
+</file>
+
+<file path=ppt/slides/slide84.xml><?xml version="1.0" encoding="utf-8"?>
+<p:sld xmlns:a="http://schemas.openxmlformats.org/drawingml/2006/main" xmlns:p="http://schemas.openxmlformats.org/presentationml/2006/main" xmlns:r="http://schemas.openxmlformats.org/officeDocument/2006/relationships">
+  <p:cSld>
+    <p:spTree>
+      <p:nvGrpSpPr>
+        <p:cNvPr id="1" name=""/>
+        <p:cNvGrpSpPr/>
+        <p:nvPr/>
+      </p:nvGrpSpPr>
+      <p:grpSpPr/>
+      <p:sp>
+        <p:nvSpPr>
+          <p:cNvPr id="2" name="TextBox 1"/>
+          <p:cNvSpPr txBox="1"/>
+          <p:nvPr/>
+        </p:nvSpPr>
+        <p:spPr>
+          <a:xfrm>
+            <a:off x="548640" y="411480"/>
+            <a:ext cx="11064240" cy="777240"/>
+          </a:xfrm>
+          <a:prstGeom prst="rect">
+            <a:avLst/>
+          </a:prstGeom>
+          <a:noFill/>
+        </p:spPr>
+        <p:txBody>
+          <a:bodyPr wrap="square">
+            <a:noAutofit/>
+          </a:bodyPr>
+          <a:lstStyle/>
+          <a:p>
+            <a:pPr>
+              <a:lnSpc>
+                <a:spcPts val="2200"/>
+              </a:lnSpc>
+              <a:defRPr sz="2800" b="1">
+                <a:solidFill>
+                  <a:srgbClr val="1A1A2E"/>
+                </a:solidFill>
+                <a:latin typeface="Calibri"/>
+              </a:defRPr>
+            </a:pPr>
+            <a:r>
+              <a:t>Example 4: Triggers and Timing</a:t>
+            </a:r>
+          </a:p>
+        </p:txBody>
+      </p:sp>
+      <p:sp>
+        <p:nvSpPr>
+          <p:cNvPr id="3" name="TextBox 2"/>
+          <p:cNvSpPr txBox="1"/>
+          <p:nvPr/>
+        </p:nvSpPr>
+        <p:spPr>
+          <a:xfrm>
+            <a:off x="548640" y="1234440"/>
+            <a:ext cx="11064240" cy="4937760"/>
+          </a:xfrm>
+          <a:prstGeom prst="rect">
+            <a:avLst/>
+          </a:prstGeom>
+          <a:noFill/>
+        </p:spPr>
+        <p:txBody>
+          <a:bodyPr wrap="square">
+            <a:noAutofit/>
+          </a:bodyPr>
+          <a:lstStyle/>
+          <a:p>
+            <a:pPr>
+              <a:lnSpc>
+                <a:spcPts val="2200"/>
+              </a:lnSpc>
+              <a:spcAft>
+                <a:spcPts val="1000"/>
+              </a:spcAft>
+              <a:defRPr sz="2000" b="0">
+                <a:solidFill>
+                  <a:srgbClr val="333333"/>
+                </a:solidFill>
+                <a:latin typeface="Calibri"/>
+              </a:defRPr>
+            </a:pPr>
+            <a:r>
+              <a:t>• Event Control: Using `@` for event-based timing</a:t>
+            </a:r>
+          </a:p>
+          <a:p>
+            <a:pPr>
+              <a:lnSpc>
+                <a:spcPts val="2200"/>
+              </a:lnSpc>
+              <a:spcAft>
+                <a:spcPts val="1000"/>
+              </a:spcAft>
+              <a:defRPr sz="2000" b="0">
+                <a:solidFill>
+                  <a:srgbClr val="333333"/>
+                </a:solidFill>
+                <a:latin typeface="Calibri"/>
+              </a:defRPr>
+            </a:pPr>
+            <a:r>
+              <a:t>• Delay Control: Using `#` for time-based delays</a:t>
+            </a:r>
+          </a:p>
+          <a:p>
+            <a:pPr>
+              <a:lnSpc>
+                <a:spcPts val="2200"/>
+              </a:lnSpc>
+              <a:spcAft>
+                <a:spcPts val="1000"/>
+              </a:spcAft>
+              <a:defRPr sz="2000" b="0">
+                <a:solidFill>
+                  <a:srgbClr val="333333"/>
+                </a:solidFill>
+                <a:latin typeface="Calibri"/>
+              </a:defRPr>
+            </a:pPr>
+            <a:r>
+              <a:t>• Wait Statements: Using `wait` for condition-based</a:t>
+            </a:r>
+          </a:p>
+          <a:p>
+            <a:pPr>
+              <a:lnSpc>
+                <a:spcPts val="2200"/>
+              </a:lnSpc>
+              <a:spcAft>
+                <a:spcPts val="1000"/>
+              </a:spcAft>
+              <a:defRPr sz="2000" b="0">
+                <a:solidFill>
+                  <a:srgbClr val="333333"/>
+                </a:solidFill>
+                <a:latin typeface="Calibri"/>
+              </a:defRPr>
+            </a:pPr>
+            <a:r>
+              <a:t>      waiting</a:t>
+            </a:r>
+          </a:p>
+        </p:txBody>
+      </p:sp>
+      <p:sp>
+        <p:nvSpPr>
+          <p:cNvPr id="4" name="TextBox 3"/>
+          <p:cNvSpPr txBox="1"/>
+          <p:nvPr/>
+        </p:nvSpPr>
+        <p:spPr>
+          <a:xfrm>
+            <a:off x="548640" y="6355080"/>
+            <a:ext cx="11064240" cy="320040"/>
+          </a:xfrm>
+          <a:prstGeom prst="rect">
+            <a:avLst/>
+          </a:prstGeom>
+          <a:noFill/>
+        </p:spPr>
+        <p:txBody>
+          <a:bodyPr wrap="square">
+            <a:noAutofit/>
+          </a:bodyPr>
+          <a:lstStyle/>
+          <a:p>
+            <a:pPr algn="r">
+              <a:lnSpc>
+                <a:spcPts val="2200"/>
+              </a:lnSpc>
+              <a:defRPr sz="1000" b="0">
+                <a:solidFill>
+                  <a:srgbClr val="666666"/>
+                </a:solidFill>
+                <a:latin typeface="Calibri"/>
+              </a:defRPr>
+            </a:pPr>
+            <a:r>
+              <a:t>learn_uvm2017_sv_verilator / Module 2</a:t>
+            </a:r>
+          </a:p>
+        </p:txBody>
+      </p:sp>
+    </p:spTree>
+  </p:cSld>
+  <p:clrMapOvr>
+    <a:masterClrMapping/>
+  </p:clrMapOvr>
+</p:sld>
+</file>
+
+<file path=ppt/slides/slide85.xml><?xml version="1.0" encoding="utf-8"?>
+<p:sld xmlns:a="http://schemas.openxmlformats.org/drawingml/2006/main" xmlns:p="http://schemas.openxmlformats.org/presentationml/2006/main" xmlns:r="http://schemas.openxmlformats.org/officeDocument/2006/relationships">
+  <p:cSld>
+    <p:spTree>
+      <p:nvGrpSpPr>
+        <p:cNvPr id="1" name=""/>
+        <p:cNvGrpSpPr/>
+        <p:nvPr/>
+      </p:nvGrpSpPr>
+      <p:grpSpPr/>
+      <p:sp>
+        <p:nvSpPr>
+          <p:cNvPr id="2" name="TextBox 1"/>
+          <p:cNvSpPr txBox="1"/>
+          <p:nvPr/>
+        </p:nvSpPr>
+        <p:spPr>
+          <a:xfrm>
+            <a:off x="548640" y="411480"/>
+            <a:ext cx="11064240" cy="777240"/>
+          </a:xfrm>
+          <a:prstGeom prst="rect">
+            <a:avLst/>
+          </a:prstGeom>
+          <a:noFill/>
+        </p:spPr>
+        <p:txBody>
+          <a:bodyPr wrap="square">
+            <a:noAutofit/>
+          </a:bodyPr>
+          <a:lstStyle/>
+          <a:p>
+            <a:pPr>
+              <a:lnSpc>
+                <a:spcPts val="2200"/>
+              </a:lnSpc>
+              <a:defRPr sz="2800" b="1">
+                <a:solidFill>
+                  <a:srgbClr val="1A1A2E"/>
+                </a:solidFill>
+                <a:latin typeface="Calibri"/>
+              </a:defRPr>
+            </a:pPr>
+            <a:r>
+              <a:t>Demo: Triggers and Timing</a:t>
+            </a:r>
+          </a:p>
+        </p:txBody>
+      </p:sp>
+      <p:sp>
+        <p:nvSpPr>
+          <p:cNvPr id="3" name="TextBox 2"/>
+          <p:cNvSpPr txBox="1"/>
+          <p:nvPr/>
+        </p:nvSpPr>
+        <p:spPr>
+          <a:xfrm>
+            <a:off x="548640" y="1051560"/>
+            <a:ext cx="11064240" cy="914400"/>
+          </a:xfrm>
+          <a:prstGeom prst="rect">
+            <a:avLst/>
+          </a:prstGeom>
+          <a:solidFill>
+            <a:srgbClr val="F4F4F4"/>
+          </a:solidFill>
+        </p:spPr>
+        <p:txBody>
+          <a:bodyPr wrap="square">
+            <a:noAutofit/>
+          </a:bodyPr>
+          <a:lstStyle/>
+          <a:p>
+            <a:pPr>
+              <a:lnSpc>
+                <a:spcPts val="2200"/>
+              </a:lnSpc>
+              <a:spcAft>
+                <a:spcPts val="200"/>
+              </a:spcAft>
+              <a:defRPr sz="2000" b="0">
+                <a:solidFill>
+                  <a:srgbClr val="333333"/>
+                </a:solidFill>
+                <a:latin typeface="Consolas"/>
+              </a:defRPr>
+            </a:pPr>
+            <a:r>
+              <a:t>$ ./scripts/module2.sh --triggers</a:t>
+            </a:r>
+          </a:p>
+        </p:txBody>
+      </p:sp>
+      <p:pic>
+        <p:nvPicPr>
+          <p:cNvPr id="4" name="Picture 3" descr="ex04_triggers.png"/>
+          <p:cNvPicPr>
+            <a:picLocks noChangeAspect="1"/>
+          </p:cNvPicPr>
+          <p:nvPr/>
+        </p:nvPicPr>
+        <p:blipFill>
+          <a:blip r:embed="rId2"/>
+          <a:stretch>
+            <a:fillRect/>
+          </a:stretch>
+        </p:blipFill>
+        <p:spPr>
+          <a:xfrm>
+            <a:off x="548640" y="1965960"/>
+            <a:ext cx="7071358" cy="3977639"/>
+          </a:xfrm>
+          <a:prstGeom prst="rect">
+            <a:avLst/>
+          </a:prstGeom>
+        </p:spPr>
+      </p:pic>
+      <p:sp>
+        <p:nvSpPr>
+          <p:cNvPr id="5" name="TextBox 4"/>
+          <p:cNvSpPr txBox="1"/>
+          <p:nvPr/>
+        </p:nvSpPr>
+        <p:spPr>
+          <a:xfrm>
+            <a:off x="548640" y="6355080"/>
+            <a:ext cx="11064240" cy="320040"/>
+          </a:xfrm>
+          <a:prstGeom prst="rect">
+            <a:avLst/>
+          </a:prstGeom>
+          <a:noFill/>
+        </p:spPr>
+        <p:txBody>
+          <a:bodyPr wrap="square">
+            <a:noAutofit/>
+          </a:bodyPr>
+          <a:lstStyle/>
+          <a:p>
+            <a:pPr algn="r">
+              <a:lnSpc>
+                <a:spcPts val="2200"/>
+              </a:lnSpc>
+              <a:defRPr sz="1000" b="0">
+                <a:solidFill>
+                  <a:srgbClr val="666666"/>
+                </a:solidFill>
+                <a:latin typeface="Calibri"/>
+              </a:defRPr>
+            </a:pPr>
+            <a:r>
+              <a:t>learn_uvm2017_sv_verilator / Module 2</a:t>
+            </a:r>
+          </a:p>
+        </p:txBody>
+      </p:sp>
+    </p:spTree>
+  </p:cSld>
+  <p:clrMapOvr>
+    <a:masterClrMapping/>
+  </p:clrMapOvr>
+</p:sld>
+</file>
+
+<file path=ppt/slides/slide86.xml><?xml version="1.0" encoding="utf-8"?>
+<p:sld xmlns:a="http://schemas.openxmlformats.org/drawingml/2006/main" xmlns:p="http://schemas.openxmlformats.org/presentationml/2006/main" xmlns:r="http://schemas.openxmlformats.org/officeDocument/2006/relationships">
+  <p:cSld>
+    <p:spTree>
+      <p:nvGrpSpPr>
+        <p:cNvPr id="1" name=""/>
+        <p:cNvGrpSpPr/>
+        <p:nvPr/>
+      </p:nvGrpSpPr>
+      <p:grpSpPr/>
+      <p:sp>
+        <p:nvSpPr>
+          <p:cNvPr id="2" name="TextBox 1"/>
+          <p:cNvSpPr txBox="1"/>
+          <p:nvPr/>
+        </p:nvSpPr>
+        <p:spPr>
+          <a:xfrm>
+            <a:off x="548640" y="411480"/>
+            <a:ext cx="11064240" cy="777240"/>
+          </a:xfrm>
+          <a:prstGeom prst="rect">
+            <a:avLst/>
+          </a:prstGeom>
+          <a:noFill/>
+        </p:spPr>
+        <p:txBody>
+          <a:bodyPr wrap="square">
+            <a:noAutofit/>
+          </a:bodyPr>
+          <a:lstStyle/>
+          <a:p>
+            <a:pPr>
+              <a:lnSpc>
+                <a:spcPts val="2200"/>
+              </a:lnSpc>
+              <a:defRPr sz="2800" b="1">
+                <a:solidFill>
+                  <a:srgbClr val="1A1A2E"/>
+                </a:solidFill>
+                <a:latin typeface="Calibri"/>
+              </a:defRPr>
+            </a:pPr>
+            <a:r>
+              <a:t>Example 5: Common Patterns</a:t>
+            </a:r>
+          </a:p>
+        </p:txBody>
+      </p:sp>
+      <p:sp>
+        <p:nvSpPr>
+          <p:cNvPr id="3" name="TextBox 2"/>
+          <p:cNvSpPr txBox="1"/>
+          <p:nvPr/>
+        </p:nvSpPr>
+        <p:spPr>
+          <a:xfrm>
+            <a:off x="548640" y="1234440"/>
+            <a:ext cx="11064240" cy="4937760"/>
+          </a:xfrm>
+          <a:prstGeom prst="rect">
+            <a:avLst/>
+          </a:prstGeom>
+          <a:noFill/>
+        </p:spPr>
+        <p:txBody>
+          <a:bodyPr wrap="square">
+            <a:noAutofit/>
+          </a:bodyPr>
+          <a:lstStyle/>
+          <a:p>
+            <a:pPr>
+              <a:lnSpc>
+                <a:spcPts val="2200"/>
+              </a:lnSpc>
+              <a:spcAft>
+                <a:spcPts val="1000"/>
+              </a:spcAft>
+              <a:defRPr sz="2000" b="0">
+                <a:solidFill>
+                  <a:srgbClr val="333333"/>
+                </a:solidFill>
+                <a:latin typeface="Calibri"/>
+              </a:defRPr>
+            </a:pPr>
+            <a:r>
+              <a:t>• Testbench Structure: Organized testbench with phases</a:t>
+            </a:r>
+          </a:p>
+          <a:p>
+            <a:pPr>
+              <a:lnSpc>
+                <a:spcPts val="2200"/>
+              </a:lnSpc>
+              <a:spcAft>
+                <a:spcPts val="1000"/>
+              </a:spcAft>
+              <a:defRPr sz="2000" b="0">
+                <a:solidFill>
+                  <a:srgbClr val="333333"/>
+                </a:solidFill>
+                <a:latin typeface="Calibri"/>
+              </a:defRPr>
+            </a:pPr>
+            <a:r>
+              <a:t>• Driver Pattern: Stimulus generation component</a:t>
+            </a:r>
+          </a:p>
+          <a:p>
+            <a:pPr>
+              <a:lnSpc>
+                <a:spcPts val="2200"/>
+              </a:lnSpc>
+              <a:spcAft>
+                <a:spcPts val="1000"/>
+              </a:spcAft>
+              <a:defRPr sz="2000" b="0">
+                <a:solidFill>
+                  <a:srgbClr val="333333"/>
+                </a:solidFill>
+                <a:latin typeface="Calibri"/>
+              </a:defRPr>
+            </a:pPr>
+            <a:r>
+              <a:t>• Monitor Pattern: Response monitoring component</a:t>
+            </a:r>
+          </a:p>
+        </p:txBody>
+      </p:sp>
+      <p:sp>
+        <p:nvSpPr>
+          <p:cNvPr id="4" name="TextBox 3"/>
+          <p:cNvSpPr txBox="1"/>
+          <p:nvPr/>
+        </p:nvSpPr>
+        <p:spPr>
+          <a:xfrm>
+            <a:off x="548640" y="6355080"/>
+            <a:ext cx="11064240" cy="320040"/>
+          </a:xfrm>
+          <a:prstGeom prst="rect">
+            <a:avLst/>
+          </a:prstGeom>
+          <a:noFill/>
+        </p:spPr>
+        <p:txBody>
+          <a:bodyPr wrap="square">
+            <a:noAutofit/>
+          </a:bodyPr>
+          <a:lstStyle/>
+          <a:p>
+            <a:pPr algn="r">
+              <a:lnSpc>
+                <a:spcPts val="2200"/>
+              </a:lnSpc>
+              <a:defRPr sz="1000" b="0">
+                <a:solidFill>
+                  <a:srgbClr val="666666"/>
+                </a:solidFill>
+                <a:latin typeface="Calibri"/>
+              </a:defRPr>
+            </a:pPr>
+            <a:r>
+              <a:t>learn_uvm2017_sv_verilator / Module 2</a:t>
+            </a:r>
+          </a:p>
+        </p:txBody>
+      </p:sp>
+    </p:spTree>
+  </p:cSld>
+  <p:clrMapOvr>
+    <a:masterClrMapping/>
+  </p:clrMapOvr>
+</p:sld>
+</file>
+
+<file path=ppt/slides/slide87.xml><?xml version="1.0" encoding="utf-8"?>
+<p:sld xmlns:a="http://schemas.openxmlformats.org/drawingml/2006/main" xmlns:p="http://schemas.openxmlformats.org/presentationml/2006/main" xmlns:r="http://schemas.openxmlformats.org/officeDocument/2006/relationships">
+  <p:cSld>
+    <p:spTree>
+      <p:nvGrpSpPr>
+        <p:cNvPr id="1" name=""/>
+        <p:cNvGrpSpPr/>
+        <p:nvPr/>
+      </p:nvGrpSpPr>
+      <p:grpSpPr/>
+      <p:sp>
+        <p:nvSpPr>
+          <p:cNvPr id="2" name="TextBox 1"/>
+          <p:cNvSpPr txBox="1"/>
+          <p:nvPr/>
+        </p:nvSpPr>
+        <p:spPr>
+          <a:xfrm>
+            <a:off x="548640" y="411480"/>
+            <a:ext cx="11064240" cy="777240"/>
+          </a:xfrm>
+          <a:prstGeom prst="rect">
+            <a:avLst/>
+          </a:prstGeom>
+          <a:noFill/>
+        </p:spPr>
+        <p:txBody>
+          <a:bodyPr wrap="square">
+            <a:noAutofit/>
+          </a:bodyPr>
+          <a:lstStyle/>
+          <a:p>
+            <a:pPr>
+              <a:lnSpc>
+                <a:spcPts val="2200"/>
+              </a:lnSpc>
+              <a:defRPr sz="2800" b="1">
+                <a:solidFill>
+                  <a:srgbClr val="1A1A2E"/>
+                </a:solidFill>
+                <a:latin typeface="Calibri"/>
+              </a:defRPr>
+            </a:pPr>
+            <a:r>
+              <a:t>Demo: Common Patterns</a:t>
+            </a:r>
+          </a:p>
+        </p:txBody>
+      </p:sp>
+      <p:sp>
+        <p:nvSpPr>
+          <p:cNvPr id="3" name="TextBox 2"/>
+          <p:cNvSpPr txBox="1"/>
+          <p:nvPr/>
+        </p:nvSpPr>
+        <p:spPr>
+          <a:xfrm>
+            <a:off x="548640" y="1051560"/>
+            <a:ext cx="11064240" cy="914400"/>
+          </a:xfrm>
+          <a:prstGeom prst="rect">
+            <a:avLst/>
+          </a:prstGeom>
+          <a:solidFill>
+            <a:srgbClr val="F4F4F4"/>
+          </a:solidFill>
+        </p:spPr>
+        <p:txBody>
+          <a:bodyPr wrap="square">
+            <a:noAutofit/>
+          </a:bodyPr>
+          <a:lstStyle/>
+          <a:p>
+            <a:pPr>
+              <a:lnSpc>
+                <a:spcPts val="2200"/>
+              </a:lnSpc>
+              <a:spcAft>
+                <a:spcPts val="200"/>
+              </a:spcAft>
+              <a:defRPr sz="2000" b="0">
+                <a:solidFill>
+                  <a:srgbClr val="333333"/>
+                </a:solidFill>
+                <a:latin typeface="Consolas"/>
+              </a:defRPr>
+            </a:pPr>
+            <a:r>
+              <a:t>$ ./scripts/module2.sh --common-patterns</a:t>
+            </a:r>
+          </a:p>
+        </p:txBody>
+      </p:sp>
+      <p:pic>
+        <p:nvPicPr>
+          <p:cNvPr id="4" name="Picture 3" descr="ex05_common_patterns.png"/>
+          <p:cNvPicPr>
+            <a:picLocks noChangeAspect="1"/>
+          </p:cNvPicPr>
+          <p:nvPr/>
+        </p:nvPicPr>
+        <p:blipFill>
+          <a:blip r:embed="rId2"/>
+          <a:stretch>
+            <a:fillRect/>
+          </a:stretch>
+        </p:blipFill>
+        <p:spPr>
+          <a:xfrm>
+            <a:off x="548640" y="1965960"/>
+            <a:ext cx="7071358" cy="3977639"/>
+          </a:xfrm>
+          <a:prstGeom prst="rect">
+            <a:avLst/>
+          </a:prstGeom>
+        </p:spPr>
+      </p:pic>
+      <p:sp>
+        <p:nvSpPr>
+          <p:cNvPr id="5" name="TextBox 4"/>
+          <p:cNvSpPr txBox="1"/>
+          <p:nvPr/>
+        </p:nvSpPr>
+        <p:spPr>
+          <a:xfrm>
+            <a:off x="548640" y="6355080"/>
+            <a:ext cx="11064240" cy="320040"/>
+          </a:xfrm>
+          <a:prstGeom prst="rect">
+            <a:avLst/>
+          </a:prstGeom>
+          <a:noFill/>
+        </p:spPr>
+        <p:txBody>
+          <a:bodyPr wrap="square">
+            <a:noAutofit/>
+          </a:bodyPr>
+          <a:lstStyle/>
+          <a:p>
+            <a:pPr algn="r">
+              <a:lnSpc>
+                <a:spcPts val="2200"/>
+              </a:lnSpc>
+              <a:defRPr sz="1000" b="0">
+                <a:solidFill>
+                  <a:srgbClr val="666666"/>
+                </a:solidFill>
+                <a:latin typeface="Calibri"/>
+              </a:defRPr>
+            </a:pPr>
+            <a:r>
+              <a:t>learn_uvm2017_sv_verilator / Module 2</a:t>
+            </a:r>
+          </a:p>
+        </p:txBody>
+      </p:sp>
+    </p:spTree>
+  </p:cSld>
+  <p:clrMapOvr>
+    <a:masterClrMapping/>
+  </p:clrMapOvr>
+</p:sld>
+</file>
+
+<file path=ppt/slides/slide88.xml><?xml version="1.0" encoding="utf-8"?>
+<p:sld xmlns:a="http://schemas.openxmlformats.org/drawingml/2006/main" xmlns:p="http://schemas.openxmlformats.org/presentationml/2006/main" xmlns:r="http://schemas.openxmlformats.org/officeDocument/2006/relationships">
+  <p:cSld>
+    <p:spTree>
+      <p:nvGrpSpPr>
+        <p:cNvPr id="1" name=""/>
+        <p:cNvGrpSpPr/>
+        <p:nvPr/>
+      </p:nvGrpSpPr>
+      <p:grpSpPr/>
+      <p:sp>
+        <p:nvSpPr>
+          <p:cNvPr id="2" name="TextBox 1"/>
+          <p:cNvSpPr txBox="1"/>
+          <p:nvPr/>
+        </p:nvSpPr>
+        <p:spPr>
+          <a:xfrm>
+            <a:off x="548640" y="2743200"/>
+            <a:ext cx="11064240" cy="1371600"/>
+          </a:xfrm>
+          <a:prstGeom prst="rect">
+            <a:avLst/>
+          </a:prstGeom>
+          <a:noFill/>
+        </p:spPr>
+        <p:txBody>
+          <a:bodyPr wrap="square">
+            <a:noAutofit/>
+          </a:bodyPr>
+          <a:lstStyle/>
+          <a:p>
+            <a:pPr algn="ctr">
+              <a:lnSpc>
+                <a:spcPts val="2200"/>
+              </a:lnSpc>
+              <a:defRPr sz="3600" b="1">
+                <a:solidFill>
+                  <a:srgbClr val="1A1A2E"/>
+                </a:solidFill>
+                <a:latin typeface="Calibri"/>
+              </a:defRPr>
+            </a:pPr>
+            <a:r>
+              <a:t>Practice &amp; assessment</a:t>
+            </a:r>
+          </a:p>
+        </p:txBody>
+      </p:sp>
+      <p:sp>
+        <p:nvSpPr>
+          <p:cNvPr id="3" name="TextBox 2"/>
+          <p:cNvSpPr txBox="1"/>
+          <p:nvPr/>
+        </p:nvSpPr>
+        <p:spPr>
+          <a:xfrm>
+            <a:off x="548640" y="6355080"/>
+            <a:ext cx="11064240" cy="320040"/>
+          </a:xfrm>
+          <a:prstGeom prst="rect">
+            <a:avLst/>
+          </a:prstGeom>
+          <a:noFill/>
+        </p:spPr>
+        <p:txBody>
+          <a:bodyPr wrap="square">
+            <a:noAutofit/>
+          </a:bodyPr>
+          <a:lstStyle/>
+          <a:p>
+            <a:pPr algn="r">
+              <a:lnSpc>
+                <a:spcPts val="2200"/>
+              </a:lnSpc>
+              <a:defRPr sz="1000" b="0">
+                <a:solidFill>
+                  <a:srgbClr val="666666"/>
+                </a:solidFill>
+                <a:latin typeface="Calibri"/>
+              </a:defRPr>
+            </a:pPr>
+            <a:r>
+              <a:t>learn_uvm2017_sv_verilator / Module 2</a:t>
+            </a:r>
+          </a:p>
+        </p:txBody>
+      </p:sp>
+    </p:spTree>
+  </p:cSld>
+  <p:clrMapOvr>
+    <a:masterClrMapping/>
+  </p:clrMapOvr>
+</p:sld>
+</file>
+
+<file path=ppt/slides/slide89.xml><?xml version="1.0" encoding="utf-8"?>
+<p:sld xmlns:a="http://schemas.openxmlformats.org/drawingml/2006/main" xmlns:p="http://schemas.openxmlformats.org/presentationml/2006/main" xmlns:r="http://schemas.openxmlformats.org/officeDocument/2006/relationships">
+  <p:cSld>
+    <p:spTree>
+      <p:nvGrpSpPr>
+        <p:cNvPr id="1" name=""/>
+        <p:cNvGrpSpPr/>
+        <p:nvPr/>
+      </p:nvGrpSpPr>
+      <p:grpSpPr/>
+      <p:sp>
+        <p:nvSpPr>
+          <p:cNvPr id="2" name="TextBox 1"/>
+          <p:cNvSpPr txBox="1"/>
+          <p:nvPr/>
+        </p:nvSpPr>
+        <p:spPr>
+          <a:xfrm>
+            <a:off x="548640" y="411480"/>
+            <a:ext cx="11064240" cy="777240"/>
+          </a:xfrm>
+          <a:prstGeom prst="rect">
+            <a:avLst/>
+          </a:prstGeom>
+          <a:noFill/>
+        </p:spPr>
+        <p:txBody>
+          <a:bodyPr wrap="square">
+            <a:noAutofit/>
+          </a:bodyPr>
+          <a:lstStyle/>
+          <a:p>
+            <a:pPr>
+              <a:lnSpc>
+                <a:spcPts val="2200"/>
+              </a:lnSpc>
+              <a:defRPr sz="2800" b="1">
+                <a:solidFill>
+                  <a:srgbClr val="1A1A2E"/>
+                </a:solidFill>
+                <a:latin typeface="Calibri"/>
+              </a:defRPr>
+            </a:pPr>
+            <a:r>
+              <a:t>What you should know (1/2)</a:t>
+            </a:r>
+          </a:p>
+        </p:txBody>
+      </p:sp>
+      <p:sp>
+        <p:nvSpPr>
+          <p:cNvPr id="3" name="TextBox 2"/>
+          <p:cNvSpPr txBox="1"/>
+          <p:nvPr/>
+        </p:nvSpPr>
+        <p:spPr>
+          <a:xfrm>
+            <a:off x="548640" y="1234440"/>
+            <a:ext cx="11064240" cy="4937760"/>
+          </a:xfrm>
+          <a:prstGeom prst="rect">
+            <a:avLst/>
+          </a:prstGeom>
+          <a:noFill/>
+        </p:spPr>
+        <p:txBody>
+          <a:bodyPr wrap="square">
+            <a:noAutofit/>
+          </a:bodyPr>
+          <a:lstStyle/>
+          <a:p>
+            <a:pPr>
+              <a:lnSpc>
+                <a:spcPts val="2200"/>
+              </a:lnSpc>
+              <a:spcAft>
+                <a:spcPts val="1000"/>
+              </a:spcAft>
+              <a:defRPr sz="2000" b="0">
+                <a:solidFill>
+                  <a:srgbClr val="333333"/>
+                </a:solidFill>
+                <a:latin typeface="Calibri"/>
+              </a:defRPr>
+            </a:pPr>
+            <a:r>
+              <a:t>• Understand SystemVerilog testbench architecture</a:t>
+            </a:r>
+          </a:p>
+          <a:p>
+            <a:pPr>
+              <a:lnSpc>
+                <a:spcPts val="2200"/>
+              </a:lnSpc>
+              <a:spcAft>
+                <a:spcPts val="1000"/>
+              </a:spcAft>
+              <a:defRPr sz="2000" b="0">
+                <a:solidFill>
+                  <a:srgbClr val="333333"/>
+                </a:solidFill>
+                <a:latin typeface="Calibri"/>
+              </a:defRPr>
+            </a:pPr>
+            <a:r>
+              <a:t>• Generate clocks and manage clock domains</a:t>
+            </a:r>
+          </a:p>
+          <a:p>
+            <a:pPr>
+              <a:lnSpc>
+                <a:spcPts val="2200"/>
+              </a:lnSpc>
+              <a:spcAft>
+                <a:spcPts val="1000"/>
+              </a:spcAft>
+              <a:defRPr sz="2000" b="0">
+                <a:solidFill>
+                  <a:srgbClr val="333333"/>
+                </a:solidFill>
+                <a:latin typeface="Calibri"/>
+              </a:defRPr>
+            </a:pPr>
+            <a:r>
+              <a:t>• Implement reset patterns and sequences</a:t>
+            </a:r>
+          </a:p>
+          <a:p>
+            <a:pPr>
+              <a:lnSpc>
+                <a:spcPts val="2200"/>
+              </a:lnSpc>
+              <a:spcAft>
+                <a:spcPts val="1000"/>
+              </a:spcAft>
+              <a:defRPr sz="2000" b="0">
+                <a:solidFill>
+                  <a:srgbClr val="333333"/>
+                </a:solidFill>
+                <a:latin typeface="Calibri"/>
+              </a:defRPr>
+            </a:pPr>
+            <a:r>
+              <a:t>• Access and drive signals correctly</a:t>
+            </a:r>
+          </a:p>
+          <a:p>
+            <a:pPr>
+              <a:lnSpc>
+                <a:spcPts val="2200"/>
+              </a:lnSpc>
+              <a:spcAft>
+                <a:spcPts val="1000"/>
+              </a:spcAft>
+              <a:defRPr sz="2000" b="0">
+                <a:solidFill>
+                  <a:srgbClr val="333333"/>
+                </a:solidFill>
+                <a:latin typeface="Calibri"/>
+              </a:defRPr>
+            </a:pPr>
+            <a:r>
+              <a:t>• Use events and timing control effectively</a:t>
+            </a:r>
+          </a:p>
+          <a:p>
+            <a:pPr>
+              <a:lnSpc>
+                <a:spcPts val="2200"/>
+              </a:lnSpc>
+              <a:spcAft>
+                <a:spcPts val="1000"/>
+              </a:spcAft>
+              <a:defRPr sz="2000" b="0">
+                <a:solidFill>
+                  <a:srgbClr val="333333"/>
+                </a:solidFill>
+                <a:latin typeface="Calibri"/>
+              </a:defRPr>
+            </a:pPr>
+            <a:r>
+              <a:t>• Apply common verification patterns</a:t>
             </a:r>
           </a:p>
         </p:txBody>
@@ -26417,6 +28655,843 @@
             </a:pPr>
             <a:r>
               <a:t>• Event scheduling</a:t>
+            </a:r>
+          </a:p>
+        </p:txBody>
+      </p:sp>
+      <p:sp>
+        <p:nvSpPr>
+          <p:cNvPr id="4" name="TextBox 3"/>
+          <p:cNvSpPr txBox="1"/>
+          <p:nvPr/>
+        </p:nvSpPr>
+        <p:spPr>
+          <a:xfrm>
+            <a:off x="548640" y="6355080"/>
+            <a:ext cx="11064240" cy="320040"/>
+          </a:xfrm>
+          <a:prstGeom prst="rect">
+            <a:avLst/>
+          </a:prstGeom>
+          <a:noFill/>
+        </p:spPr>
+        <p:txBody>
+          <a:bodyPr wrap="square">
+            <a:noAutofit/>
+          </a:bodyPr>
+          <a:lstStyle/>
+          <a:p>
+            <a:pPr algn="r">
+              <a:lnSpc>
+                <a:spcPts val="2200"/>
+              </a:lnSpc>
+              <a:defRPr sz="1000" b="0">
+                <a:solidFill>
+                  <a:srgbClr val="666666"/>
+                </a:solidFill>
+                <a:latin typeface="Calibri"/>
+              </a:defRPr>
+            </a:pPr>
+            <a:r>
+              <a:t>learn_uvm2017_sv_verilator / Module 2</a:t>
+            </a:r>
+          </a:p>
+        </p:txBody>
+      </p:sp>
+    </p:spTree>
+  </p:cSld>
+  <p:clrMapOvr>
+    <a:masterClrMapping/>
+  </p:clrMapOvr>
+</p:sld>
+</file>
+
+<file path=ppt/slides/slide90.xml><?xml version="1.0" encoding="utf-8"?>
+<p:sld xmlns:a="http://schemas.openxmlformats.org/drawingml/2006/main" xmlns:p="http://schemas.openxmlformats.org/presentationml/2006/main" xmlns:r="http://schemas.openxmlformats.org/officeDocument/2006/relationships">
+  <p:cSld>
+    <p:spTree>
+      <p:nvGrpSpPr>
+        <p:cNvPr id="1" name=""/>
+        <p:cNvGrpSpPr/>
+        <p:nvPr/>
+      </p:nvGrpSpPr>
+      <p:grpSpPr/>
+      <p:sp>
+        <p:nvSpPr>
+          <p:cNvPr id="2" name="TextBox 1"/>
+          <p:cNvSpPr txBox="1"/>
+          <p:nvPr/>
+        </p:nvSpPr>
+        <p:spPr>
+          <a:xfrm>
+            <a:off x="548640" y="411480"/>
+            <a:ext cx="11064240" cy="777240"/>
+          </a:xfrm>
+          <a:prstGeom prst="rect">
+            <a:avLst/>
+          </a:prstGeom>
+          <a:noFill/>
+        </p:spPr>
+        <p:txBody>
+          <a:bodyPr wrap="square">
+            <a:noAutofit/>
+          </a:bodyPr>
+          <a:lstStyle/>
+          <a:p>
+            <a:pPr>
+              <a:lnSpc>
+                <a:spcPts val="2200"/>
+              </a:lnSpc>
+              <a:defRPr sz="2800" b="1">
+                <a:solidFill>
+                  <a:srgbClr val="1A1A2E"/>
+                </a:solidFill>
+                <a:latin typeface="Calibri"/>
+              </a:defRPr>
+            </a:pPr>
+            <a:r>
+              <a:t>What you should know (2/2)</a:t>
+            </a:r>
+          </a:p>
+        </p:txBody>
+      </p:sp>
+      <p:sp>
+        <p:nvSpPr>
+          <p:cNvPr id="3" name="TextBox 2"/>
+          <p:cNvSpPr txBox="1"/>
+          <p:nvPr/>
+        </p:nvSpPr>
+        <p:spPr>
+          <a:xfrm>
+            <a:off x="548640" y="1234440"/>
+            <a:ext cx="11064240" cy="4937760"/>
+          </a:xfrm>
+          <a:prstGeom prst="rect">
+            <a:avLst/>
+          </a:prstGeom>
+          <a:noFill/>
+        </p:spPr>
+        <p:txBody>
+          <a:bodyPr wrap="square">
+            <a:noAutofit/>
+          </a:bodyPr>
+          <a:lstStyle/>
+          <a:p>
+            <a:pPr>
+              <a:lnSpc>
+                <a:spcPts val="2200"/>
+              </a:lnSpc>
+              <a:spcAft>
+                <a:spcPts val="1000"/>
+              </a:spcAft>
+              <a:defRPr sz="2000" b="0">
+                <a:solidFill>
+                  <a:srgbClr val="333333"/>
+                </a:solidFill>
+                <a:latin typeface="Calibri"/>
+              </a:defRPr>
+            </a:pPr>
+            <a:r>
+              <a:t>• Structure testbenches for maintainability</a:t>
+            </a:r>
+          </a:p>
+          <a:p>
+            <a:pPr>
+              <a:lnSpc>
+                <a:spcPts val="2200"/>
+              </a:lnSpc>
+              <a:spcAft>
+                <a:spcPts val="1000"/>
+              </a:spcAft>
+              <a:defRPr sz="2000" b="0">
+                <a:solidFill>
+                  <a:srgbClr val="333333"/>
+                </a:solidFill>
+                <a:latin typeface="Calibri"/>
+              </a:defRPr>
+            </a:pPr>
+            <a:r>
+              <a:t>• Prepare for UVM methodology</a:t>
+            </a:r>
+          </a:p>
+          <a:p>
+            <a:pPr>
+              <a:lnSpc>
+                <a:spcPts val="2200"/>
+              </a:lnSpc>
+              <a:spcAft>
+                <a:spcPts val="1000"/>
+              </a:spcAft>
+              <a:defRPr sz="2000" b="0">
+                <a:solidFill>
+                  <a:srgbClr val="333333"/>
+                </a:solidFill>
+                <a:latin typeface="Calibri"/>
+              </a:defRPr>
+            </a:pPr>
+            <a:r>
+              <a:t>• Write effective testbench tasks and functions</a:t>
+            </a:r>
+          </a:p>
+          <a:p>
+            <a:pPr>
+              <a:lnSpc>
+                <a:spcPts val="2200"/>
+              </a:lnSpc>
+              <a:spcAft>
+                <a:spcPts val="1000"/>
+              </a:spcAft>
+              <a:defRPr sz="2000" b="0">
+                <a:solidFill>
+                  <a:srgbClr val="333333"/>
+                </a:solidFill>
+                <a:latin typeface="Calibri"/>
+              </a:defRPr>
+            </a:pPr>
+            <a:r>
+              <a:t>• Use timing control constructs properly</a:t>
+            </a:r>
+          </a:p>
+        </p:txBody>
+      </p:sp>
+      <p:sp>
+        <p:nvSpPr>
+          <p:cNvPr id="4" name="TextBox 3"/>
+          <p:cNvSpPr txBox="1"/>
+          <p:nvPr/>
+        </p:nvSpPr>
+        <p:spPr>
+          <a:xfrm>
+            <a:off x="548640" y="6355080"/>
+            <a:ext cx="11064240" cy="320040"/>
+          </a:xfrm>
+          <a:prstGeom prst="rect">
+            <a:avLst/>
+          </a:prstGeom>
+          <a:noFill/>
+        </p:spPr>
+        <p:txBody>
+          <a:bodyPr wrap="square">
+            <a:noAutofit/>
+          </a:bodyPr>
+          <a:lstStyle/>
+          <a:p>
+            <a:pPr algn="r">
+              <a:lnSpc>
+                <a:spcPts val="2200"/>
+              </a:lnSpc>
+              <a:defRPr sz="1000" b="0">
+                <a:solidFill>
+                  <a:srgbClr val="666666"/>
+                </a:solidFill>
+                <a:latin typeface="Calibri"/>
+              </a:defRPr>
+            </a:pPr>
+            <a:r>
+              <a:t>learn_uvm2017_sv_verilator / Module 2</a:t>
+            </a:r>
+          </a:p>
+        </p:txBody>
+      </p:sp>
+    </p:spTree>
+  </p:cSld>
+  <p:clrMapOvr>
+    <a:masterClrMapping/>
+  </p:clrMapOvr>
+</p:sld>
+</file>
+
+<file path=ppt/slides/slide91.xml><?xml version="1.0" encoding="utf-8"?>
+<p:sld xmlns:a="http://schemas.openxmlformats.org/drawingml/2006/main" xmlns:p="http://schemas.openxmlformats.org/presentationml/2006/main" xmlns:r="http://schemas.openxmlformats.org/officeDocument/2006/relationships">
+  <p:cSld>
+    <p:spTree>
+      <p:nvGrpSpPr>
+        <p:cNvPr id="1" name=""/>
+        <p:cNvGrpSpPr/>
+        <p:nvPr/>
+      </p:nvGrpSpPr>
+      <p:grpSpPr/>
+      <p:sp>
+        <p:nvSpPr>
+          <p:cNvPr id="2" name="TextBox 1"/>
+          <p:cNvSpPr txBox="1"/>
+          <p:nvPr/>
+        </p:nvSpPr>
+        <p:spPr>
+          <a:xfrm>
+            <a:off x="548640" y="411480"/>
+            <a:ext cx="11064240" cy="777240"/>
+          </a:xfrm>
+          <a:prstGeom prst="rect">
+            <a:avLst/>
+          </a:prstGeom>
+          <a:noFill/>
+        </p:spPr>
+        <p:txBody>
+          <a:bodyPr wrap="square">
+            <a:noAutofit/>
+          </a:bodyPr>
+          <a:lstStyle/>
+          <a:p>
+            <a:pPr>
+              <a:lnSpc>
+                <a:spcPts val="2200"/>
+              </a:lnSpc>
+              <a:defRPr sz="2800" b="1">
+                <a:solidFill>
+                  <a:srgbClr val="1A1A2E"/>
+                </a:solidFill>
+                <a:latin typeface="Calibri"/>
+              </a:defRPr>
+            </a:pPr>
+            <a:r>
+              <a:t>Exercises</a:t>
+            </a:r>
+          </a:p>
+        </p:txBody>
+      </p:sp>
+      <p:sp>
+        <p:nvSpPr>
+          <p:cNvPr id="3" name="TextBox 2"/>
+          <p:cNvSpPr txBox="1"/>
+          <p:nvPr/>
+        </p:nvSpPr>
+        <p:spPr>
+          <a:xfrm>
+            <a:off x="548640" y="1234440"/>
+            <a:ext cx="11064240" cy="4937760"/>
+          </a:xfrm>
+          <a:prstGeom prst="rect">
+            <a:avLst/>
+          </a:prstGeom>
+          <a:noFill/>
+        </p:spPr>
+        <p:txBody>
+          <a:bodyPr wrap="square">
+            <a:noAutofit/>
+          </a:bodyPr>
+          <a:lstStyle/>
+          <a:p>
+            <a:pPr>
+              <a:lnSpc>
+                <a:spcPts val="2200"/>
+              </a:lnSpc>
+              <a:spcAft>
+                <a:spcPts val="1000"/>
+              </a:spcAft>
+              <a:defRPr sz="2000" b="0">
+                <a:solidFill>
+                  <a:srgbClr val="333333"/>
+                </a:solidFill>
+                <a:latin typeface="Calibri"/>
+              </a:defRPr>
+            </a:pPr>
+            <a:r>
+              <a:t>• Clock Generation</a:t>
+            </a:r>
+          </a:p>
+          <a:p>
+            <a:pPr>
+              <a:lnSpc>
+                <a:spcPts val="2200"/>
+              </a:lnSpc>
+              <a:spcAft>
+                <a:spcPts val="1000"/>
+              </a:spcAft>
+              <a:defRPr sz="2000" b="0">
+                <a:solidFill>
+                  <a:srgbClr val="333333"/>
+                </a:solidFill>
+                <a:latin typeface="Calibri"/>
+              </a:defRPr>
+            </a:pPr>
+            <a:r>
+              <a:t>• Reset Implementation</a:t>
+            </a:r>
+          </a:p>
+          <a:p>
+            <a:pPr>
+              <a:lnSpc>
+                <a:spcPts val="2200"/>
+              </a:lnSpc>
+              <a:spcAft>
+                <a:spcPts val="1000"/>
+              </a:spcAft>
+              <a:defRPr sz="2000" b="0">
+                <a:solidFill>
+                  <a:srgbClr val="333333"/>
+                </a:solidFill>
+                <a:latin typeface="Calibri"/>
+              </a:defRPr>
+            </a:pPr>
+            <a:r>
+              <a:t>• Signal Access</a:t>
+            </a:r>
+          </a:p>
+          <a:p>
+            <a:pPr>
+              <a:lnSpc>
+                <a:spcPts val="2200"/>
+              </a:lnSpc>
+              <a:spcAft>
+                <a:spcPts val="1000"/>
+              </a:spcAft>
+              <a:defRPr sz="2000" b="0">
+                <a:solidFill>
+                  <a:srgbClr val="333333"/>
+                </a:solidFill>
+                <a:latin typeface="Calibri"/>
+              </a:defRPr>
+            </a:pPr>
+            <a:r>
+              <a:t>• Timing Control</a:t>
+            </a:r>
+          </a:p>
+          <a:p>
+            <a:pPr>
+              <a:lnSpc>
+                <a:spcPts val="2200"/>
+              </a:lnSpc>
+              <a:spcAft>
+                <a:spcPts val="1000"/>
+              </a:spcAft>
+              <a:defRPr sz="2000" b="0">
+                <a:solidFill>
+                  <a:srgbClr val="333333"/>
+                </a:solidFill>
+                <a:latin typeface="Calibri"/>
+              </a:defRPr>
+            </a:pPr>
+            <a:r>
+              <a:t>• Testbench Patterns</a:t>
+            </a:r>
+          </a:p>
+        </p:txBody>
+      </p:sp>
+      <p:sp>
+        <p:nvSpPr>
+          <p:cNvPr id="4" name="TextBox 3"/>
+          <p:cNvSpPr txBox="1"/>
+          <p:nvPr/>
+        </p:nvSpPr>
+        <p:spPr>
+          <a:xfrm>
+            <a:off x="548640" y="6355080"/>
+            <a:ext cx="11064240" cy="320040"/>
+          </a:xfrm>
+          <a:prstGeom prst="rect">
+            <a:avLst/>
+          </a:prstGeom>
+          <a:noFill/>
+        </p:spPr>
+        <p:txBody>
+          <a:bodyPr wrap="square">
+            <a:noAutofit/>
+          </a:bodyPr>
+          <a:lstStyle/>
+          <a:p>
+            <a:pPr algn="r">
+              <a:lnSpc>
+                <a:spcPts val="2200"/>
+              </a:lnSpc>
+              <a:defRPr sz="1000" b="0">
+                <a:solidFill>
+                  <a:srgbClr val="666666"/>
+                </a:solidFill>
+                <a:latin typeface="Calibri"/>
+              </a:defRPr>
+            </a:pPr>
+            <a:r>
+              <a:t>learn_uvm2017_sv_verilator / Module 2</a:t>
+            </a:r>
+          </a:p>
+        </p:txBody>
+      </p:sp>
+    </p:spTree>
+  </p:cSld>
+  <p:clrMapOvr>
+    <a:masterClrMapping/>
+  </p:clrMapOvr>
+</p:sld>
+</file>
+
+<file path=ppt/slides/slide92.xml><?xml version="1.0" encoding="utf-8"?>
+<p:sld xmlns:a="http://schemas.openxmlformats.org/drawingml/2006/main" xmlns:p="http://schemas.openxmlformats.org/presentationml/2006/main" xmlns:r="http://schemas.openxmlformats.org/officeDocument/2006/relationships">
+  <p:cSld>
+    <p:spTree>
+      <p:nvGrpSpPr>
+        <p:cNvPr id="1" name=""/>
+        <p:cNvGrpSpPr/>
+        <p:nvPr/>
+      </p:nvGrpSpPr>
+      <p:grpSpPr/>
+      <p:sp>
+        <p:nvSpPr>
+          <p:cNvPr id="2" name="TextBox 1"/>
+          <p:cNvSpPr txBox="1"/>
+          <p:nvPr/>
+        </p:nvSpPr>
+        <p:spPr>
+          <a:xfrm>
+            <a:off x="548640" y="411480"/>
+            <a:ext cx="11064240" cy="777240"/>
+          </a:xfrm>
+          <a:prstGeom prst="rect">
+            <a:avLst/>
+          </a:prstGeom>
+          <a:noFill/>
+        </p:spPr>
+        <p:txBody>
+          <a:bodyPr wrap="square">
+            <a:noAutofit/>
+          </a:bodyPr>
+          <a:lstStyle/>
+          <a:p>
+            <a:pPr>
+              <a:lnSpc>
+                <a:spcPts val="2200"/>
+              </a:lnSpc>
+              <a:defRPr sz="2800" b="1">
+                <a:solidFill>
+                  <a:srgbClr val="1A1A2E"/>
+                </a:solidFill>
+                <a:latin typeface="Calibri"/>
+              </a:defRPr>
+            </a:pPr>
+            <a:r>
+              <a:t>Assessment checklist</a:t>
+            </a:r>
+          </a:p>
+        </p:txBody>
+      </p:sp>
+      <p:sp>
+        <p:nvSpPr>
+          <p:cNvPr id="3" name="TextBox 2"/>
+          <p:cNvSpPr txBox="1"/>
+          <p:nvPr/>
+        </p:nvSpPr>
+        <p:spPr>
+          <a:xfrm>
+            <a:off x="548640" y="1234440"/>
+            <a:ext cx="11064240" cy="4937760"/>
+          </a:xfrm>
+          <a:prstGeom prst="rect">
+            <a:avLst/>
+          </a:prstGeom>
+          <a:noFill/>
+        </p:spPr>
+        <p:txBody>
+          <a:bodyPr wrap="square">
+            <a:noAutofit/>
+          </a:bodyPr>
+          <a:lstStyle/>
+          <a:p>
+            <a:pPr>
+              <a:lnSpc>
+                <a:spcPts val="2200"/>
+              </a:lnSpc>
+              <a:spcAft>
+                <a:spcPts val="1000"/>
+              </a:spcAft>
+              <a:defRPr sz="2000" b="0">
+                <a:solidFill>
+                  <a:srgbClr val="333333"/>
+                </a:solidFill>
+                <a:latin typeface="Calibri"/>
+              </a:defRPr>
+            </a:pPr>
+            <a:r>
+              <a:t>• Can generate clocks and manage clock domains</a:t>
+            </a:r>
+          </a:p>
+          <a:p>
+            <a:pPr>
+              <a:lnSpc>
+                <a:spcPts val="2200"/>
+              </a:lnSpc>
+              <a:spcAft>
+                <a:spcPts val="1000"/>
+              </a:spcAft>
+              <a:defRPr sz="2000" b="0">
+                <a:solidFill>
+                  <a:srgbClr val="333333"/>
+                </a:solidFill>
+                <a:latin typeface="Calibri"/>
+              </a:defRPr>
+            </a:pPr>
+            <a:r>
+              <a:t>• Can implement reset patterns</a:t>
+            </a:r>
+          </a:p>
+          <a:p>
+            <a:pPr>
+              <a:lnSpc>
+                <a:spcPts val="2200"/>
+              </a:lnSpc>
+              <a:spcAft>
+                <a:spcPts val="1000"/>
+              </a:spcAft>
+              <a:defRPr sz="2000" b="0">
+                <a:solidFill>
+                  <a:srgbClr val="333333"/>
+                </a:solidFill>
+                <a:latin typeface="Calibri"/>
+              </a:defRPr>
+            </a:pPr>
+            <a:r>
+              <a:t>• Can access and drive signals correctly</a:t>
+            </a:r>
+          </a:p>
+          <a:p>
+            <a:pPr>
+              <a:lnSpc>
+                <a:spcPts val="2200"/>
+              </a:lnSpc>
+              <a:spcAft>
+                <a:spcPts val="1000"/>
+              </a:spcAft>
+              <a:defRPr sz="2000" b="0">
+                <a:solidFill>
+                  <a:srgbClr val="333333"/>
+                </a:solidFill>
+                <a:latin typeface="Calibri"/>
+              </a:defRPr>
+            </a:pPr>
+            <a:r>
+              <a:t>• Can use events and timing control</a:t>
+            </a:r>
+          </a:p>
+          <a:p>
+            <a:pPr>
+              <a:lnSpc>
+                <a:spcPts val="2200"/>
+              </a:lnSpc>
+              <a:spcAft>
+                <a:spcPts val="1000"/>
+              </a:spcAft>
+              <a:defRPr sz="2000" b="0">
+                <a:solidFill>
+                  <a:srgbClr val="333333"/>
+                </a:solidFill>
+                <a:latin typeface="Calibri"/>
+              </a:defRPr>
+            </a:pPr>
+            <a:r>
+              <a:t>• Can apply common verification patterns</a:t>
+            </a:r>
+          </a:p>
+          <a:p>
+            <a:pPr>
+              <a:lnSpc>
+                <a:spcPts val="2200"/>
+              </a:lnSpc>
+              <a:spcAft>
+                <a:spcPts val="1000"/>
+              </a:spcAft>
+              <a:defRPr sz="2000" b="0">
+                <a:solidFill>
+                  <a:srgbClr val="333333"/>
+                </a:solidFill>
+                <a:latin typeface="Calibri"/>
+              </a:defRPr>
+            </a:pPr>
+            <a:r>
+              <a:t>• Can structure testbenches effectively</a:t>
+            </a:r>
+          </a:p>
+        </p:txBody>
+      </p:sp>
+      <p:sp>
+        <p:nvSpPr>
+          <p:cNvPr id="4" name="TextBox 3"/>
+          <p:cNvSpPr txBox="1"/>
+          <p:nvPr/>
+        </p:nvSpPr>
+        <p:spPr>
+          <a:xfrm>
+            <a:off x="548640" y="6355080"/>
+            <a:ext cx="11064240" cy="320040"/>
+          </a:xfrm>
+          <a:prstGeom prst="rect">
+            <a:avLst/>
+          </a:prstGeom>
+          <a:noFill/>
+        </p:spPr>
+        <p:txBody>
+          <a:bodyPr wrap="square">
+            <a:noAutofit/>
+          </a:bodyPr>
+          <a:lstStyle/>
+          <a:p>
+            <a:pPr algn="r">
+              <a:lnSpc>
+                <a:spcPts val="2200"/>
+              </a:lnSpc>
+              <a:defRPr sz="1000" b="0">
+                <a:solidFill>
+                  <a:srgbClr val="666666"/>
+                </a:solidFill>
+                <a:latin typeface="Calibri"/>
+              </a:defRPr>
+            </a:pPr>
+            <a:r>
+              <a:t>learn_uvm2017_sv_verilator / Module 2</a:t>
+            </a:r>
+          </a:p>
+        </p:txBody>
+      </p:sp>
+    </p:spTree>
+  </p:cSld>
+  <p:clrMapOvr>
+    <a:masterClrMapping/>
+  </p:clrMapOvr>
+</p:sld>
+</file>
+
+<file path=ppt/slides/slide93.xml><?xml version="1.0" encoding="utf-8"?>
+<p:sld xmlns:a="http://schemas.openxmlformats.org/drawingml/2006/main" xmlns:p="http://schemas.openxmlformats.org/presentationml/2006/main" xmlns:r="http://schemas.openxmlformats.org/officeDocument/2006/relationships">
+  <p:cSld>
+    <p:spTree>
+      <p:nvGrpSpPr>
+        <p:cNvPr id="1" name=""/>
+        <p:cNvGrpSpPr/>
+        <p:nvPr/>
+      </p:nvGrpSpPr>
+      <p:grpSpPr/>
+      <p:sp>
+        <p:nvSpPr>
+          <p:cNvPr id="2" name="TextBox 1"/>
+          <p:cNvSpPr txBox="1"/>
+          <p:nvPr/>
+        </p:nvSpPr>
+        <p:spPr>
+          <a:xfrm>
+            <a:off x="548640" y="411480"/>
+            <a:ext cx="11064240" cy="777240"/>
+          </a:xfrm>
+          <a:prstGeom prst="rect">
+            <a:avLst/>
+          </a:prstGeom>
+          <a:noFill/>
+        </p:spPr>
+        <p:txBody>
+          <a:bodyPr wrap="square">
+            <a:noAutofit/>
+          </a:bodyPr>
+          <a:lstStyle/>
+          <a:p>
+            <a:pPr>
+              <a:lnSpc>
+                <a:spcPts val="2200"/>
+              </a:lnSpc>
+              <a:defRPr sz="2800" b="1">
+                <a:solidFill>
+                  <a:srgbClr val="1A1A2E"/>
+                </a:solidFill>
+                <a:latin typeface="Calibri"/>
+              </a:defRPr>
+            </a:pPr>
+            <a:r>
+              <a:t>Summary &amp; next steps</a:t>
+            </a:r>
+          </a:p>
+        </p:txBody>
+      </p:sp>
+      <p:sp>
+        <p:nvSpPr>
+          <p:cNvPr id="3" name="TextBox 2"/>
+          <p:cNvSpPr txBox="1"/>
+          <p:nvPr/>
+        </p:nvSpPr>
+        <p:spPr>
+          <a:xfrm>
+            <a:off x="548640" y="1234440"/>
+            <a:ext cx="11064240" cy="4937760"/>
+          </a:xfrm>
+          <a:prstGeom prst="rect">
+            <a:avLst/>
+          </a:prstGeom>
+          <a:noFill/>
+        </p:spPr>
+        <p:txBody>
+          <a:bodyPr wrap="square">
+            <a:noAutofit/>
+          </a:bodyPr>
+          <a:lstStyle/>
+          <a:p>
+            <a:pPr>
+              <a:lnSpc>
+                <a:spcPts val="2200"/>
+              </a:lnSpc>
+              <a:spcAft>
+                <a:spcPts val="1000"/>
+              </a:spcAft>
+              <a:defRPr sz="2000" b="0">
+                <a:solidFill>
+                  <a:srgbClr val="333333"/>
+                </a:solidFill>
+                <a:latin typeface="Calibri"/>
+              </a:defRPr>
+            </a:pPr>
+            <a:r>
+              <a:t>• Master SystemVerilog testbench construction</a:t>
+            </a:r>
+          </a:p>
+          <a:p>
+            <a:pPr>
+              <a:lnSpc>
+                <a:spcPts val="2200"/>
+              </a:lnSpc>
+              <a:spcAft>
+                <a:spcPts val="1000"/>
+              </a:spcAft>
+              <a:defRPr sz="2000" b="0">
+                <a:solidFill>
+                  <a:srgbClr val="333333"/>
+                </a:solidFill>
+                <a:latin typeface="Calibri"/>
+              </a:defRPr>
+            </a:pPr>
+            <a:r>
+              <a:t>• Complete module2/CHECKLIST.md</a:t>
+            </a:r>
+          </a:p>
+          <a:p>
+            <a:pPr>
+              <a:lnSpc>
+                <a:spcPts val="2200"/>
+              </a:lnSpc>
+              <a:spcAft>
+                <a:spcPts val="1000"/>
+              </a:spcAft>
+              <a:defRPr sz="2000" b="0">
+                <a:solidFill>
+                  <a:srgbClr val="333333"/>
+                </a:solidFill>
+                <a:latin typeface="Calibri"/>
+              </a:defRPr>
+            </a:pPr>
+            <a:r>
+              <a:t>• Review module2/EXAMPLES.md and run each lab</a:t>
+            </a:r>
+          </a:p>
+          <a:p>
+            <a:pPr>
+              <a:lnSpc>
+                <a:spcPts val="2200"/>
+              </a:lnSpc>
+              <a:spcAft>
+                <a:spcPts val="1000"/>
+              </a:spcAft>
+              <a:defRPr sz="2000" b="0">
+                <a:solidFill>
+                  <a:srgbClr val="333333"/>
+                </a:solidFill>
+                <a:latin typeface="Calibri"/>
+              </a:defRPr>
+            </a:pPr>
+            <a:r>
+              <a:t>• Next: Next module in course</a:t>
             </a:r>
           </a:p>
         </p:txBody>
